--- a/preview_v7/che/l-che-b2-u7-1.pptx
+++ b/preview_v7/che/l-che-b2-u7-1.pptx
@@ -3142,61 +3142,20 @@
       </p:sp>
       <p:sp>
         <p:nvSpPr>
-          <p:cNvPr id="3" name="TextBox 2"/>
-          <p:cNvSpPr txBox="1"/>
-          <p:nvPr/>
-        </p:nvSpPr>
-        <p:spPr>
-          <a:xfrm>
-            <a:off x="640080" y="640080"/>
-            <a:ext cx="10911535" cy="502920"/>
+          <p:cNvPr id="3" name="Rectangle 2"/>
+          <p:cNvSpPr/>
+          <p:nvPr/>
+        </p:nvSpPr>
+        <p:spPr>
+          <a:xfrm>
+            <a:off x="0" y="0"/>
+            <a:ext cx="12191695" cy="2194560"/>
           </a:xfrm>
           <a:prstGeom prst="rect">
             <a:avLst/>
           </a:prstGeom>
-          <a:noFill/>
-        </p:spPr>
-        <p:txBody>
-          <a:bodyPr wrap="square" anchor="t" lIns="0" rIns="0" tIns="0" bIns="0">
-            <a:spAutoFit/>
-          </a:bodyPr>
-          <a:lstStyle/>
-          <a:p>
-            <a:pPr algn="l">
-              <a:spcAft>
-                <a:spcPts val="0"/>
-              </a:spcAft>
-            </a:pPr>
-            <a:r>
-              <a:rPr sz="1200" b="1">
-                <a:solidFill>
-                  <a:srgbClr val="B23A2A"/>
-                </a:solidFill>
-                <a:latin typeface="微软雅黑"/>
-                <a:ea typeface="微软雅黑"/>
-                <a:cs typeface="微软雅黑"/>
-              </a:rPr>
-              <a:t>化学 · 必修第二册 · 第7单元 有机化合物</a:t>
-            </a:r>
-          </a:p>
-        </p:txBody>
-      </p:sp>
-      <p:sp>
-        <p:nvSpPr>
-          <p:cNvPr id="4" name="Rectangle 3"/>
-          <p:cNvSpPr/>
-          <p:nvPr/>
-        </p:nvSpPr>
-        <p:spPr>
-          <a:xfrm>
-            <a:off x="640080" y="1207008"/>
-            <a:ext cx="822960" cy="30480"/>
-          </a:xfrm>
-          <a:prstGeom prst="rect">
-            <a:avLst/>
-          </a:prstGeom>
           <a:solidFill>
-            <a:srgbClr val="B23A2A"/>
+            <a:srgbClr val="1C2A33"/>
           </a:solidFill>
           <a:ln>
             <a:noFill/>
@@ -3227,92 +3186,14 @@
       </p:sp>
       <p:sp>
         <p:nvSpPr>
-          <p:cNvPr id="5" name="TextBox 4"/>
-          <p:cNvSpPr txBox="1"/>
-          <p:nvPr/>
-        </p:nvSpPr>
-        <p:spPr>
-          <a:xfrm>
-            <a:off x="640080" y="1737360"/>
-            <a:ext cx="10911535" cy="2011680"/>
-          </a:xfrm>
-          <a:prstGeom prst="rect">
-            <a:avLst/>
-          </a:prstGeom>
-          <a:noFill/>
-        </p:spPr>
-        <p:txBody>
-          <a:bodyPr wrap="square" anchor="t" lIns="0" rIns="0" tIns="0" bIns="0">
-            <a:spAutoFit/>
-          </a:bodyPr>
-          <a:lstStyle/>
-          <a:p>
-            <a:pPr algn="l">
-              <a:lnSpc>
-                <a:spcPct val="115000"/>
-              </a:lnSpc>
-            </a:pPr>
-            <a:r>
-              <a:rPr sz="4000" b="1">
-                <a:solidFill>
-                  <a:srgbClr val="1C2A33"/>
-                </a:solidFill>
-                <a:latin typeface="楷体"/>
-                <a:ea typeface="楷体"/>
-                <a:cs typeface="楷体"/>
-              </a:rPr>
-              <a:t>认识有机化合物——甲烷</a:t>
-            </a:r>
-          </a:p>
-        </p:txBody>
-      </p:sp>
-      <p:sp>
-        <p:nvSpPr>
-          <p:cNvPr id="6" name="TextBox 5"/>
-          <p:cNvSpPr txBox="1"/>
-          <p:nvPr/>
-        </p:nvSpPr>
-        <p:spPr>
-          <a:xfrm>
-            <a:off x="640080" y="3840480"/>
-            <a:ext cx="10911535" cy="457200"/>
-          </a:xfrm>
-          <a:prstGeom prst="rect">
-            <a:avLst/>
-          </a:prstGeom>
-          <a:noFill/>
-        </p:spPr>
-        <p:txBody>
-          <a:bodyPr wrap="square" anchor="t" lIns="0" rIns="0" tIns="0" bIns="0">
-            <a:spAutoFit/>
-          </a:bodyPr>
-          <a:lstStyle/>
-          <a:p>
-            <a:pPr algn="l"/>
-            <a:r>
-              <a:rPr sz="1700" b="1">
-                <a:solidFill>
-                  <a:srgbClr val="B23A2A"/>
-                </a:solidFill>
-                <a:latin typeface="微软雅黑"/>
-                <a:ea typeface="微软雅黑"/>
-                <a:cs typeface="微软雅黑"/>
-              </a:rPr>
-              <a:t>新课  ·  第1课时  ·  45分钟</a:t>
-            </a:r>
-          </a:p>
-        </p:txBody>
-      </p:sp>
-      <p:sp>
-        <p:nvSpPr>
-          <p:cNvPr id="7" name="Rectangle 6"/>
+          <p:cNvPr id="4" name="Rectangle 3"/>
           <p:cNvSpPr/>
           <p:nvPr/>
         </p:nvSpPr>
         <p:spPr>
           <a:xfrm>
-            <a:off x="640080" y="5394960"/>
-            <a:ext cx="2011680" cy="33020"/>
+            <a:off x="640080" y="457200"/>
+            <a:ext cx="822960" cy="38100"/>
           </a:xfrm>
           <a:prstGeom prst="rect">
             <a:avLst/>
@@ -3349,14 +3230,14 @@
       </p:sp>
       <p:sp>
         <p:nvSpPr>
-          <p:cNvPr id="8" name="TextBox 7"/>
+          <p:cNvPr id="5" name="TextBox 4"/>
           <p:cNvSpPr txBox="1"/>
           <p:nvPr/>
         </p:nvSpPr>
         <p:spPr>
           <a:xfrm>
-            <a:off x="640080" y="5623560"/>
-            <a:ext cx="10911535" cy="548640"/>
+            <a:off x="640080" y="566928"/>
+            <a:ext cx="10911535" cy="457200"/>
           </a:xfrm>
           <a:prstGeom prst="rect">
             <a:avLst/>
@@ -3371,22 +3252,236 @@
           <a:p>
             <a:pPr algn="l"/>
             <a:r>
-              <a:rPr sz="1400" b="0">
-                <a:solidFill>
-                  <a:srgbClr val="6B6258"/>
+              <a:rPr sz="1500" b="1">
+                <a:solidFill>
+                  <a:srgbClr val="C8A86B"/>
                 </a:solidFill>
                 <a:latin typeface="微软雅黑"/>
                 <a:ea typeface="微软雅黑"/>
                 <a:cs typeface="微软雅黑"/>
               </a:rPr>
-              <a:t>学习任务群：    |    年级：高一</a:t>
-            </a:r>
+              <a:t>必修第二册 · 第7章 有机化合物</a:t>
+            </a:r>
+          </a:p>
+        </p:txBody>
+      </p:sp>
+      <p:sp>
+        <p:nvSpPr>
+          <p:cNvPr id="6" name="TextBox 5"/>
+          <p:cNvSpPr txBox="1"/>
+          <p:nvPr/>
+        </p:nvSpPr>
+        <p:spPr>
+          <a:xfrm>
+            <a:off x="640080" y="914400"/>
+            <a:ext cx="11247120" cy="1097280"/>
+          </a:xfrm>
+          <a:prstGeom prst="rect">
+            <a:avLst/>
+          </a:prstGeom>
+          <a:noFill/>
+        </p:spPr>
+        <p:txBody>
+          <a:bodyPr wrap="square" anchor="t" lIns="0" rIns="0" tIns="0" bIns="0">
+            <a:spAutoFit/>
+          </a:bodyPr>
+          <a:lstStyle/>
+          <a:p>
+            <a:pPr algn="l"/>
+            <a:r>
+              <a:rPr sz="4400" b="1">
+                <a:solidFill>
+                  <a:srgbClr val="FFFFFF"/>
+                </a:solidFill>
+                <a:latin typeface="楷体"/>
+                <a:ea typeface="楷体"/>
+                <a:cs typeface="楷体"/>
+              </a:rPr>
+              <a:t>认识有机化合物——甲烷</a:t>
+            </a:r>
+          </a:p>
+        </p:txBody>
+      </p:sp>
+      <p:sp>
+        <p:nvSpPr>
+          <p:cNvPr id="7" name="TextBox 6"/>
+          <p:cNvSpPr txBox="1"/>
+          <p:nvPr/>
+        </p:nvSpPr>
+        <p:spPr>
+          <a:xfrm>
+            <a:off x="640080" y="1828800"/>
+            <a:ext cx="10911535" cy="365760"/>
+          </a:xfrm>
+          <a:prstGeom prst="rect">
+            <a:avLst/>
+          </a:prstGeom>
+          <a:noFill/>
+        </p:spPr>
+        <p:txBody>
+          <a:bodyPr wrap="square" anchor="t" lIns="0" rIns="0" tIns="0" bIns="0">
+            <a:spAutoFit/>
+          </a:bodyPr>
+          <a:lstStyle/>
+          <a:p>
+            <a:pPr algn="l"/>
+            <a:r>
+              <a:rPr sz="1600" b="0">
+                <a:solidFill>
+                  <a:srgbClr val="E7DFD2"/>
+                </a:solidFill>
+                <a:latin typeface="微软雅黑"/>
+                <a:ea typeface="微软雅黑"/>
+                <a:cs typeface="微软雅黑"/>
+              </a:rPr>
+              <a:t>第1课 · 学生课堂版</a:t>
+            </a:r>
+          </a:p>
+        </p:txBody>
+      </p:sp>
+      <p:sp>
+        <p:nvSpPr>
+          <p:cNvPr id="8" name="Rounded Rectangle 7"/>
+          <p:cNvSpPr/>
+          <p:nvPr/>
+        </p:nvSpPr>
+        <p:spPr>
+          <a:xfrm>
+            <a:off x="640080" y="2743200"/>
+            <a:ext cx="10911535" cy="2331720"/>
+          </a:xfrm>
+          <a:prstGeom prst="roundRect">
+            <a:avLst/>
+          </a:prstGeom>
+          <a:solidFill>
+            <a:srgbClr val="2E7D6B"/>
+          </a:solidFill>
+          <a:ln>
+            <a:noFill/>
+          </a:ln>
+          <a:effectLst/>
+        </p:spPr>
+        <p:style>
+          <a:lnRef idx="1">
+            <a:schemeClr val="accent1"/>
+          </a:lnRef>
+          <a:fillRef idx="3">
+            <a:schemeClr val="accent1"/>
+          </a:fillRef>
+          <a:effectRef idx="2">
+            <a:schemeClr val="accent1"/>
+          </a:effectRef>
+          <a:fontRef idx="minor">
+            <a:schemeClr val="lt1"/>
+          </a:fontRef>
+        </p:style>
+        <p:txBody>
+          <a:bodyPr rtlCol="0" anchor="ctr"/>
+          <a:lstStyle/>
+          <a:p>
+            <a:pPr algn="ctr"/>
           </a:p>
         </p:txBody>
       </p:sp>
       <p:sp>
         <p:nvSpPr>
           <p:cNvPr id="9" name="TextBox 8"/>
+          <p:cNvSpPr txBox="1"/>
+          <p:nvPr/>
+        </p:nvSpPr>
+        <p:spPr>
+          <a:xfrm>
+            <a:off x="1005840" y="2971800"/>
+            <a:ext cx="10180015" cy="640080"/>
+          </a:xfrm>
+          <a:prstGeom prst="rect">
+            <a:avLst/>
+          </a:prstGeom>
+          <a:noFill/>
+        </p:spPr>
+        <p:txBody>
+          <a:bodyPr wrap="square" anchor="t" lIns="0" rIns="0" tIns="0" bIns="0">
+            <a:spAutoFit/>
+          </a:bodyPr>
+          <a:lstStyle/>
+          <a:p>
+            <a:pPr algn="l"/>
+            <a:r>
+              <a:rPr sz="2600" b="1">
+                <a:solidFill>
+                  <a:srgbClr val="FFFFFF"/>
+                </a:solidFill>
+                <a:latin typeface="楷体"/>
+                <a:ea typeface="楷体"/>
+                <a:cs typeface="楷体"/>
+              </a:rPr>
+              <a:t>化学 · 有机与能量</a:t>
+            </a:r>
+          </a:p>
+        </p:txBody>
+      </p:sp>
+      <p:sp>
+        <p:nvSpPr>
+          <p:cNvPr id="10" name="TextBox 9"/>
+          <p:cNvSpPr txBox="1"/>
+          <p:nvPr/>
+        </p:nvSpPr>
+        <p:spPr>
+          <a:xfrm>
+            <a:off x="1005840" y="3657600"/>
+            <a:ext cx="10180015" cy="1097280"/>
+          </a:xfrm>
+          <a:prstGeom prst="rect">
+            <a:avLst/>
+          </a:prstGeom>
+          <a:noFill/>
+        </p:spPr>
+        <p:txBody>
+          <a:bodyPr wrap="square" anchor="t" lIns="0" rIns="0" tIns="0" bIns="0">
+            <a:spAutoFit/>
+          </a:bodyPr>
+          <a:lstStyle/>
+          <a:p>
+            <a:pPr algn="l">
+              <a:lnSpc>
+                <a:spcPct val="150000"/>
+              </a:lnSpc>
+            </a:pPr>
+            <a:r>
+              <a:rPr sz="1500" b="0">
+                <a:solidFill>
+                  <a:srgbClr val="E7DFD2"/>
+                </a:solidFill>
+                <a:latin typeface="楷体"/>
+                <a:ea typeface="楷体"/>
+                <a:cs typeface="楷体"/>
+              </a:rPr>
+              <a:t>本课件按规范以学科色块呈现，不套用无关配图。</a:t>
+            </a:r>
+          </a:p>
+          <a:p>
+            <a:pPr algn="l">
+              <a:spcBef>
+                <a:spcPts val="600"/>
+              </a:spcBef>
+            </a:pPr>
+            <a:r>
+              <a:rPr sz="1300" b="0">
+                <a:solidFill>
+                  <a:srgbClr val="FFFFFF"/>
+                </a:solidFill>
+                <a:latin typeface="微软雅黑"/>
+                <a:ea typeface="微软雅黑"/>
+                <a:cs typeface="微软雅黑"/>
+              </a:rPr>
+              <a:t>本课件未使用无关配图（按规范以学科色块呈现）</a:t>
+            </a:r>
+          </a:p>
+        </p:txBody>
+      </p:sp>
+      <p:sp>
+        <p:nvSpPr>
+          <p:cNvPr id="11" name="TextBox 10"/>
           <p:cNvSpPr txBox="1"/>
           <p:nvPr/>
         </p:nvSpPr>
@@ -3570,14 +3665,51 @@
       </p:sp>
       <p:sp>
         <p:nvSpPr>
-          <p:cNvPr id="5" name="Rounded Rectangle 4"/>
+          <p:cNvPr id="5" name="TextBox 4"/>
+          <p:cNvSpPr txBox="1"/>
+          <p:nvPr/>
+        </p:nvSpPr>
+        <p:spPr>
+          <a:xfrm>
+            <a:off x="640080" y="1325880"/>
+            <a:ext cx="10911535" cy="548640"/>
+          </a:xfrm>
+          <a:prstGeom prst="rect">
+            <a:avLst/>
+          </a:prstGeom>
+          <a:noFill/>
+        </p:spPr>
+        <p:txBody>
+          <a:bodyPr wrap="square" anchor="t" lIns="0" rIns="0" tIns="0" bIns="0">
+            <a:spAutoFit/>
+          </a:bodyPr>
+          <a:lstStyle/>
+          <a:p>
+            <a:pPr algn="l"/>
+            <a:r>
+              <a:rPr sz="3200" b="1">
+                <a:solidFill>
+                  <a:srgbClr val="1C2A33"/>
+                </a:solidFill>
+                <a:latin typeface="楷体"/>
+                <a:ea typeface="楷体"/>
+                <a:cs typeface="楷体"/>
+              </a:rPr>
+              <a:t>四向学习目标</a:t>
+            </a:r>
+          </a:p>
+        </p:txBody>
+      </p:sp>
+      <p:sp>
+        <p:nvSpPr>
+          <p:cNvPr id="6" name="Rounded Rectangle 5"/>
           <p:cNvSpPr/>
           <p:nvPr/>
         </p:nvSpPr>
         <p:spPr>
           <a:xfrm>
-            <a:off x="640080" y="1417320"/>
-            <a:ext cx="5349240" cy="2057400"/>
+            <a:off x="640080" y="2057400"/>
+            <a:ext cx="5318607" cy="1874519"/>
           </a:xfrm>
           <a:prstGeom prst="roundRect">
             <a:avLst/>
@@ -3585,7 +3717,7 @@
           <a:solidFill>
             <a:srgbClr val="FFFFFF"/>
           </a:solidFill>
-          <a:ln w="22860">
+          <a:ln w="20320">
             <a:solidFill>
               <a:srgbClr val="B23A2A"/>
             </a:solidFill>
@@ -3616,23 +3748,82 @@
       </p:sp>
       <p:sp>
         <p:nvSpPr>
-          <p:cNvPr id="6" name="Oval 5"/>
+          <p:cNvPr id="7" name="TextBox 6"/>
+          <p:cNvSpPr txBox="1"/>
+          <p:nvPr/>
+        </p:nvSpPr>
+        <p:spPr>
+          <a:xfrm>
+            <a:off x="868680" y="2221992"/>
+            <a:ext cx="4861407" cy="1545335"/>
+          </a:xfrm>
+          <a:prstGeom prst="rect">
+            <a:avLst/>
+          </a:prstGeom>
+          <a:noFill/>
+        </p:spPr>
+        <p:txBody>
+          <a:bodyPr wrap="square" lIns="0" rIns="0" tIns="0" bIns="0">
+            <a:spAutoFit/>
+          </a:bodyPr>
+          <a:lstStyle/>
+          <a:p>
+            <a:r>
+              <a:rPr sz="1500" b="1">
+                <a:solidFill>
+                  <a:srgbClr val="B23A2A"/>
+                </a:solidFill>
+                <a:latin typeface="微软雅黑"/>
+                <a:ea typeface="微软雅黑"/>
+                <a:cs typeface="微软雅黑"/>
+              </a:rPr>
+              <a:t>宏观辨识与微观探析</a:t>
+            </a:r>
+          </a:p>
+          <a:p>
+            <a:pPr>
+              <a:lnSpc>
+                <a:spcPct val="140000"/>
+              </a:lnSpc>
+              <a:spcBef>
+                <a:spcPts val="500"/>
+              </a:spcBef>
+            </a:pPr>
+            <a:r>
+              <a:rPr sz="1300">
+                <a:solidFill>
+                  <a:srgbClr val="1C2A33"/>
+                </a:solidFill>
+                <a:latin typeface="楷体"/>
+                <a:ea typeface="楷体"/>
+                <a:cs typeface="楷体"/>
+              </a:rPr>
+              <a:t>描述甲烷的结构(正四面体)与主要性质。</a:t>
+            </a:r>
+          </a:p>
+        </p:txBody>
+      </p:sp>
+      <p:sp>
+        <p:nvSpPr>
+          <p:cNvPr id="8" name="Rounded Rectangle 7"/>
           <p:cNvSpPr/>
           <p:nvPr/>
         </p:nvSpPr>
         <p:spPr>
           <a:xfrm>
-            <a:off x="804672" y="1581912"/>
-            <a:ext cx="457200" cy="457200"/>
-          </a:xfrm>
-          <a:prstGeom prst="ellipse">
+            <a:off x="6233007" y="2057400"/>
+            <a:ext cx="5318607" cy="1874519"/>
+          </a:xfrm>
+          <a:prstGeom prst="roundRect">
             <a:avLst/>
           </a:prstGeom>
           <a:solidFill>
-            <a:srgbClr val="B23A2A"/>
+            <a:srgbClr val="FFFFFF"/>
           </a:solidFill>
-          <a:ln>
-            <a:noFill/>
+          <a:ln w="20320">
+            <a:solidFill>
+              <a:srgbClr val="2E7D6B"/>
+            </a:solidFill>
           </a:ln>
           <a:effectLst/>
         </p:spPr>
@@ -3660,14 +3851,14 @@
       </p:sp>
       <p:sp>
         <p:nvSpPr>
-          <p:cNvPr id="7" name="TextBox 6"/>
+          <p:cNvPr id="9" name="TextBox 8"/>
           <p:cNvSpPr txBox="1"/>
           <p:nvPr/>
         </p:nvSpPr>
         <p:spPr>
           <a:xfrm>
-            <a:off x="804672" y="1636776"/>
-            <a:ext cx="457200" cy="384048"/>
+            <a:off x="6461607" y="2221992"/>
+            <a:ext cx="4861407" cy="1545335"/>
           </a:xfrm>
           <a:prstGeom prst="rect">
             <a:avLst/>
@@ -3675,96 +3866,34 @@
           <a:noFill/>
         </p:spPr>
         <p:txBody>
-          <a:bodyPr wrap="square" anchor="t" lIns="0" rIns="0" tIns="0" bIns="0">
+          <a:bodyPr wrap="square" lIns="0" rIns="0" tIns="0" bIns="0">
             <a:spAutoFit/>
           </a:bodyPr>
           <a:lstStyle/>
           <a:p>
-            <a:pPr algn="ctr"/>
-            <a:r>
-              <a:rPr sz="1600" b="1">
-                <a:solidFill>
-                  <a:srgbClr val="FFFFFF"/>
+            <a:r>
+              <a:rPr sz="1500" b="1">
+                <a:solidFill>
+                  <a:srgbClr val="2E7D6B"/>
                 </a:solidFill>
                 <a:latin typeface="微软雅黑"/>
                 <a:ea typeface="微软雅黑"/>
                 <a:cs typeface="微软雅黑"/>
               </a:rPr>
-              <a:t>1</a:t>
-            </a:r>
-          </a:p>
-        </p:txBody>
-      </p:sp>
-      <p:sp>
-        <p:nvSpPr>
-          <p:cNvPr id="8" name="TextBox 7"/>
-          <p:cNvSpPr txBox="1"/>
-          <p:nvPr/>
-        </p:nvSpPr>
-        <p:spPr>
-          <a:xfrm>
-            <a:off x="1371600" y="1527048"/>
-            <a:ext cx="4434840" cy="457200"/>
-          </a:xfrm>
-          <a:prstGeom prst="rect">
-            <a:avLst/>
-          </a:prstGeom>
-          <a:noFill/>
-        </p:spPr>
-        <p:txBody>
-          <a:bodyPr wrap="square" anchor="t" lIns="0" rIns="0" tIns="0" bIns="0">
-            <a:spAutoFit/>
-          </a:bodyPr>
-          <a:lstStyle/>
-          <a:p>
-            <a:pPr algn="l">
+              <a:t>变化观念与平衡思想</a:t>
+            </a:r>
+          </a:p>
+          <a:p>
+            <a:pPr>
               <a:lnSpc>
-                <a:spcPct val="110000"/>
+                <a:spcPct val="140000"/>
               </a:lnSpc>
+              <a:spcBef>
+                <a:spcPts val="500"/>
+              </a:spcBef>
             </a:pPr>
             <a:r>
-              <a:rPr sz="1600" b="1">
-                <a:solidFill>
-                  <a:srgbClr val="1C2A33"/>
-                </a:solidFill>
-                <a:latin typeface="微软雅黑"/>
-                <a:ea typeface="微软雅黑"/>
-                <a:cs typeface="微软雅黑"/>
-              </a:rPr>
-              <a:t>目标</a:t>
-            </a:r>
-          </a:p>
-        </p:txBody>
-      </p:sp>
-      <p:sp>
-        <p:nvSpPr>
-          <p:cNvPr id="9" name="TextBox 8"/>
-          <p:cNvSpPr txBox="1"/>
-          <p:nvPr/>
-        </p:nvSpPr>
-        <p:spPr>
-          <a:xfrm>
-            <a:off x="1371600" y="1965960"/>
-            <a:ext cx="4434840" cy="1417320"/>
-          </a:xfrm>
-          <a:prstGeom prst="rect">
-            <a:avLst/>
-          </a:prstGeom>
-          <a:noFill/>
-        </p:spPr>
-        <p:txBody>
-          <a:bodyPr wrap="square" anchor="t" lIns="0" rIns="0" tIns="0" bIns="0">
-            <a:spAutoFit/>
-          </a:bodyPr>
-          <a:lstStyle/>
-          <a:p>
-            <a:pPr algn="l">
-              <a:lnSpc>
-                <a:spcPct val="128000"/>
-              </a:lnSpc>
-            </a:pPr>
-            <a:r>
-              <a:rPr sz="1400" b="0">
+              <a:rPr sz="1300">
                 <a:solidFill>
                   <a:srgbClr val="1C2A33"/>
                 </a:solidFill>
@@ -3772,7 +3901,7 @@
                 <a:ea typeface="楷体"/>
                 <a:cs typeface="楷体"/>
               </a:rPr>
-              <a:t>宏观辨识与微观探析：描述甲烷的结构(正四面体)与主要性质。</a:t>
+              <a:t>认识取代反应的特点(逐步取代、可逆共存)。</a:t>
             </a:r>
           </a:p>
         </p:txBody>
@@ -3785,8 +3914,8 @@
         </p:nvSpPr>
         <p:spPr>
           <a:xfrm>
-            <a:off x="6263640" y="1417320"/>
-            <a:ext cx="5349240" cy="2057400"/>
+            <a:off x="640080" y="4206239"/>
+            <a:ext cx="5318607" cy="1874519"/>
           </a:xfrm>
           <a:prstGeom prst="roundRect">
             <a:avLst/>
@@ -3794,9 +3923,9 @@
           <a:solidFill>
             <a:srgbClr val="FFFFFF"/>
           </a:solidFill>
-          <a:ln w="22860">
+          <a:ln w="20320">
             <a:solidFill>
-              <a:srgbClr val="B23A2A"/>
+              <a:srgbClr val="C8A86B"/>
             </a:solidFill>
           </a:ln>
           <a:effectLst/>
@@ -3825,23 +3954,82 @@
       </p:sp>
       <p:sp>
         <p:nvSpPr>
-          <p:cNvPr id="11" name="Oval 10"/>
+          <p:cNvPr id="11" name="TextBox 10"/>
+          <p:cNvSpPr txBox="1"/>
+          <p:nvPr/>
+        </p:nvSpPr>
+        <p:spPr>
+          <a:xfrm>
+            <a:off x="868680" y="4370831"/>
+            <a:ext cx="4861407" cy="1545335"/>
+          </a:xfrm>
+          <a:prstGeom prst="rect">
+            <a:avLst/>
+          </a:prstGeom>
+          <a:noFill/>
+        </p:spPr>
+        <p:txBody>
+          <a:bodyPr wrap="square" lIns="0" rIns="0" tIns="0" bIns="0">
+            <a:spAutoFit/>
+          </a:bodyPr>
+          <a:lstStyle/>
+          <a:p>
+            <a:r>
+              <a:rPr sz="1500" b="1">
+                <a:solidFill>
+                  <a:srgbClr val="C8A86B"/>
+                </a:solidFill>
+                <a:latin typeface="微软雅黑"/>
+                <a:ea typeface="微软雅黑"/>
+                <a:cs typeface="微软雅黑"/>
+              </a:rPr>
+              <a:t>证据推理与模型认知</a:t>
+            </a:r>
+          </a:p>
+          <a:p>
+            <a:pPr>
+              <a:lnSpc>
+                <a:spcPct val="140000"/>
+              </a:lnSpc>
+              <a:spcBef>
+                <a:spcPts val="500"/>
+              </a:spcBef>
+            </a:pPr>
+            <a:r>
+              <a:rPr sz="1300">
+                <a:solidFill>
+                  <a:srgbClr val="1C2A33"/>
+                </a:solidFill>
+                <a:latin typeface="楷体"/>
+                <a:ea typeface="楷体"/>
+                <a:cs typeface="楷体"/>
+              </a:rPr>
+              <a:t>用结构模型解释甲烷的对称性与取代产物。</a:t>
+            </a:r>
+          </a:p>
+        </p:txBody>
+      </p:sp>
+      <p:sp>
+        <p:nvSpPr>
+          <p:cNvPr id="12" name="Rounded Rectangle 11"/>
           <p:cNvSpPr/>
           <p:nvPr/>
         </p:nvSpPr>
         <p:spPr>
           <a:xfrm>
-            <a:off x="6428232" y="1581912"/>
-            <a:ext cx="457200" cy="457200"/>
-          </a:xfrm>
-          <a:prstGeom prst="ellipse">
+            <a:off x="6233007" y="4206239"/>
+            <a:ext cx="5318607" cy="1874519"/>
+          </a:xfrm>
+          <a:prstGeom prst="roundRect">
             <a:avLst/>
           </a:prstGeom>
           <a:solidFill>
-            <a:srgbClr val="B23A2A"/>
+            <a:srgbClr val="FFFFFF"/>
           </a:solidFill>
-          <a:ln>
-            <a:noFill/>
+          <a:ln w="20320">
+            <a:solidFill>
+              <a:srgbClr val="6B6258"/>
+            </a:solidFill>
           </a:ln>
           <a:effectLst/>
         </p:spPr>
@@ -3869,14 +4057,14 @@
       </p:sp>
       <p:sp>
         <p:nvSpPr>
-          <p:cNvPr id="12" name="TextBox 11"/>
+          <p:cNvPr id="13" name="TextBox 12"/>
           <p:cNvSpPr txBox="1"/>
           <p:nvPr/>
         </p:nvSpPr>
         <p:spPr>
           <a:xfrm>
-            <a:off x="6428232" y="1636776"/>
-            <a:ext cx="457200" cy="384048"/>
+            <a:off x="6461607" y="4370831"/>
+            <a:ext cx="4861407" cy="1545335"/>
           </a:xfrm>
           <a:prstGeom prst="rect">
             <a:avLst/>
@@ -3884,96 +4072,34 @@
           <a:noFill/>
         </p:spPr>
         <p:txBody>
-          <a:bodyPr wrap="square" anchor="t" lIns="0" rIns="0" tIns="0" bIns="0">
+          <a:bodyPr wrap="square" lIns="0" rIns="0" tIns="0" bIns="0">
             <a:spAutoFit/>
           </a:bodyPr>
           <a:lstStyle/>
           <a:p>
-            <a:pPr algn="ctr"/>
-            <a:r>
-              <a:rPr sz="1600" b="1">
-                <a:solidFill>
-                  <a:srgbClr val="FFFFFF"/>
+            <a:r>
+              <a:rPr sz="1500" b="1">
+                <a:solidFill>
+                  <a:srgbClr val="6B6258"/>
                 </a:solidFill>
                 <a:latin typeface="微软雅黑"/>
                 <a:ea typeface="微软雅黑"/>
                 <a:cs typeface="微软雅黑"/>
               </a:rPr>
-              <a:t>2</a:t>
-            </a:r>
-          </a:p>
-        </p:txBody>
-      </p:sp>
-      <p:sp>
-        <p:nvSpPr>
-          <p:cNvPr id="13" name="TextBox 12"/>
-          <p:cNvSpPr txBox="1"/>
-          <p:nvPr/>
-        </p:nvSpPr>
-        <p:spPr>
-          <a:xfrm>
-            <a:off x="6995160" y="1527048"/>
-            <a:ext cx="4434840" cy="457200"/>
-          </a:xfrm>
-          <a:prstGeom prst="rect">
-            <a:avLst/>
-          </a:prstGeom>
-          <a:noFill/>
-        </p:spPr>
-        <p:txBody>
-          <a:bodyPr wrap="square" anchor="t" lIns="0" rIns="0" tIns="0" bIns="0">
-            <a:spAutoFit/>
-          </a:bodyPr>
-          <a:lstStyle/>
-          <a:p>
-            <a:pPr algn="l">
+              <a:t>科学探究与创新意识</a:t>
+            </a:r>
+          </a:p>
+          <a:p>
+            <a:pPr>
               <a:lnSpc>
-                <a:spcPct val="110000"/>
+                <a:spcPct val="140000"/>
               </a:lnSpc>
+              <a:spcBef>
+                <a:spcPts val="500"/>
+              </a:spcBef>
             </a:pPr>
             <a:r>
-              <a:rPr sz="1600" b="1">
-                <a:solidFill>
-                  <a:srgbClr val="1C2A33"/>
-                </a:solidFill>
-                <a:latin typeface="微软雅黑"/>
-                <a:ea typeface="微软雅黑"/>
-                <a:cs typeface="微软雅黑"/>
-              </a:rPr>
-              <a:t>目标</a:t>
-            </a:r>
-          </a:p>
-        </p:txBody>
-      </p:sp>
-      <p:sp>
-        <p:nvSpPr>
-          <p:cNvPr id="14" name="TextBox 13"/>
-          <p:cNvSpPr txBox="1"/>
-          <p:nvPr/>
-        </p:nvSpPr>
-        <p:spPr>
-          <a:xfrm>
-            <a:off x="6995160" y="1965960"/>
-            <a:ext cx="4434840" cy="1417320"/>
-          </a:xfrm>
-          <a:prstGeom prst="rect">
-            <a:avLst/>
-          </a:prstGeom>
-          <a:noFill/>
-        </p:spPr>
-        <p:txBody>
-          <a:bodyPr wrap="square" anchor="t" lIns="0" rIns="0" tIns="0" bIns="0">
-            <a:spAutoFit/>
-          </a:bodyPr>
-          <a:lstStyle/>
-          <a:p>
-            <a:pPr algn="l">
-              <a:lnSpc>
-                <a:spcPct val="128000"/>
-              </a:lnSpc>
-            </a:pPr>
-            <a:r>
-              <a:rPr sz="1400" b="0">
+              <a:rPr sz="1300">
                 <a:solidFill>
                   <a:srgbClr val="1C2A33"/>
                 </a:solidFill>
@@ -3981,432 +4107,14 @@
                 <a:ea typeface="楷体"/>
                 <a:cs typeface="楷体"/>
               </a:rPr>
-              <a:t>变化观念与平衡思想：认识取代反应的特点(逐步取代、可逆共存)。</a:t>
-            </a:r>
-          </a:p>
-        </p:txBody>
-      </p:sp>
-      <p:sp>
-        <p:nvSpPr>
-          <p:cNvPr id="15" name="Rounded Rectangle 14"/>
-          <p:cNvSpPr/>
-          <p:nvPr/>
-        </p:nvSpPr>
-        <p:spPr>
-          <a:xfrm>
-            <a:off x="640080" y="3703320"/>
-            <a:ext cx="5349240" cy="2057400"/>
-          </a:xfrm>
-          <a:prstGeom prst="roundRect">
-            <a:avLst/>
-          </a:prstGeom>
-          <a:solidFill>
-            <a:srgbClr val="FFFFFF"/>
-          </a:solidFill>
-          <a:ln w="22860">
-            <a:solidFill>
-              <a:srgbClr val="B23A2A"/>
-            </a:solidFill>
-          </a:ln>
-          <a:effectLst/>
-        </p:spPr>
-        <p:style>
-          <a:lnRef idx="1">
-            <a:schemeClr val="accent1"/>
-          </a:lnRef>
-          <a:fillRef idx="3">
-            <a:schemeClr val="accent1"/>
-          </a:fillRef>
-          <a:effectRef idx="2">
-            <a:schemeClr val="accent1"/>
-          </a:effectRef>
-          <a:fontRef idx="minor">
-            <a:schemeClr val="lt1"/>
-          </a:fontRef>
-        </p:style>
-        <p:txBody>
-          <a:bodyPr rtlCol="0" anchor="ctr"/>
-          <a:lstStyle/>
-          <a:p>
-            <a:pPr algn="ctr"/>
-          </a:p>
-        </p:txBody>
-      </p:sp>
-      <p:sp>
-        <p:nvSpPr>
-          <p:cNvPr id="16" name="Oval 15"/>
-          <p:cNvSpPr/>
-          <p:nvPr/>
-        </p:nvSpPr>
-        <p:spPr>
-          <a:xfrm>
-            <a:off x="804672" y="3867912"/>
-            <a:ext cx="457200" cy="457200"/>
-          </a:xfrm>
-          <a:prstGeom prst="ellipse">
-            <a:avLst/>
-          </a:prstGeom>
-          <a:solidFill>
-            <a:srgbClr val="B23A2A"/>
-          </a:solidFill>
-          <a:ln>
-            <a:noFill/>
-          </a:ln>
-          <a:effectLst/>
-        </p:spPr>
-        <p:style>
-          <a:lnRef idx="1">
-            <a:schemeClr val="accent1"/>
-          </a:lnRef>
-          <a:fillRef idx="3">
-            <a:schemeClr val="accent1"/>
-          </a:fillRef>
-          <a:effectRef idx="2">
-            <a:schemeClr val="accent1"/>
-          </a:effectRef>
-          <a:fontRef idx="minor">
-            <a:schemeClr val="lt1"/>
-          </a:fontRef>
-        </p:style>
-        <p:txBody>
-          <a:bodyPr rtlCol="0" anchor="ctr"/>
-          <a:lstStyle/>
-          <a:p>
-            <a:pPr algn="ctr"/>
-          </a:p>
-        </p:txBody>
-      </p:sp>
-      <p:sp>
-        <p:nvSpPr>
-          <p:cNvPr id="17" name="TextBox 16"/>
-          <p:cNvSpPr txBox="1"/>
-          <p:nvPr/>
-        </p:nvSpPr>
-        <p:spPr>
-          <a:xfrm>
-            <a:off x="804672" y="3922776"/>
-            <a:ext cx="457200" cy="384048"/>
-          </a:xfrm>
-          <a:prstGeom prst="rect">
-            <a:avLst/>
-          </a:prstGeom>
-          <a:noFill/>
-        </p:spPr>
-        <p:txBody>
-          <a:bodyPr wrap="square" anchor="t" lIns="0" rIns="0" tIns="0" bIns="0">
-            <a:spAutoFit/>
-          </a:bodyPr>
-          <a:lstStyle/>
-          <a:p>
-            <a:pPr algn="ctr"/>
-            <a:r>
-              <a:rPr sz="1600" b="1">
-                <a:solidFill>
-                  <a:srgbClr val="FFFFFF"/>
-                </a:solidFill>
-                <a:latin typeface="微软雅黑"/>
-                <a:ea typeface="微软雅黑"/>
-                <a:cs typeface="微软雅黑"/>
-              </a:rPr>
-              <a:t>3</a:t>
-            </a:r>
-          </a:p>
-        </p:txBody>
-      </p:sp>
-      <p:sp>
-        <p:nvSpPr>
-          <p:cNvPr id="18" name="TextBox 17"/>
-          <p:cNvSpPr txBox="1"/>
-          <p:nvPr/>
-        </p:nvSpPr>
-        <p:spPr>
-          <a:xfrm>
-            <a:off x="1371600" y="3813048"/>
-            <a:ext cx="4434840" cy="457200"/>
-          </a:xfrm>
-          <a:prstGeom prst="rect">
-            <a:avLst/>
-          </a:prstGeom>
-          <a:noFill/>
-        </p:spPr>
-        <p:txBody>
-          <a:bodyPr wrap="square" anchor="t" lIns="0" rIns="0" tIns="0" bIns="0">
-            <a:spAutoFit/>
-          </a:bodyPr>
-          <a:lstStyle/>
-          <a:p>
-            <a:pPr algn="l">
-              <a:lnSpc>
-                <a:spcPct val="110000"/>
-              </a:lnSpc>
-            </a:pPr>
-            <a:r>
-              <a:rPr sz="1600" b="1">
-                <a:solidFill>
-                  <a:srgbClr val="1C2A33"/>
-                </a:solidFill>
-                <a:latin typeface="微软雅黑"/>
-                <a:ea typeface="微软雅黑"/>
-                <a:cs typeface="微软雅黑"/>
-              </a:rPr>
-              <a:t>目标</a:t>
-            </a:r>
-          </a:p>
-        </p:txBody>
-      </p:sp>
-      <p:sp>
-        <p:nvSpPr>
-          <p:cNvPr id="19" name="TextBox 18"/>
-          <p:cNvSpPr txBox="1"/>
-          <p:nvPr/>
-        </p:nvSpPr>
-        <p:spPr>
-          <a:xfrm>
-            <a:off x="1371600" y="4251960"/>
-            <a:ext cx="4434840" cy="1417320"/>
-          </a:xfrm>
-          <a:prstGeom prst="rect">
-            <a:avLst/>
-          </a:prstGeom>
-          <a:noFill/>
-        </p:spPr>
-        <p:txBody>
-          <a:bodyPr wrap="square" anchor="t" lIns="0" rIns="0" tIns="0" bIns="0">
-            <a:spAutoFit/>
-          </a:bodyPr>
-          <a:lstStyle/>
-          <a:p>
-            <a:pPr algn="l">
-              <a:lnSpc>
-                <a:spcPct val="128000"/>
-              </a:lnSpc>
-            </a:pPr>
-            <a:r>
-              <a:rPr sz="1400" b="0">
-                <a:solidFill>
-                  <a:srgbClr val="1C2A33"/>
-                </a:solidFill>
-                <a:latin typeface="楷体"/>
-                <a:ea typeface="楷体"/>
-                <a:cs typeface="楷体"/>
-              </a:rPr>
-              <a:t>证据推理与模型认知：用结构模型解释甲烷的对称性与取代产物。</a:t>
-            </a:r>
-          </a:p>
-        </p:txBody>
-      </p:sp>
-      <p:sp>
-        <p:nvSpPr>
-          <p:cNvPr id="20" name="Rounded Rectangle 19"/>
-          <p:cNvSpPr/>
-          <p:nvPr/>
-        </p:nvSpPr>
-        <p:spPr>
-          <a:xfrm>
-            <a:off x="6263640" y="3703320"/>
-            <a:ext cx="5349240" cy="2057400"/>
-          </a:xfrm>
-          <a:prstGeom prst="roundRect">
-            <a:avLst/>
-          </a:prstGeom>
-          <a:solidFill>
-            <a:srgbClr val="FFFFFF"/>
-          </a:solidFill>
-          <a:ln w="22860">
-            <a:solidFill>
-              <a:srgbClr val="B23A2A"/>
-            </a:solidFill>
-          </a:ln>
-          <a:effectLst/>
-        </p:spPr>
-        <p:style>
-          <a:lnRef idx="1">
-            <a:schemeClr val="accent1"/>
-          </a:lnRef>
-          <a:fillRef idx="3">
-            <a:schemeClr val="accent1"/>
-          </a:fillRef>
-          <a:effectRef idx="2">
-            <a:schemeClr val="accent1"/>
-          </a:effectRef>
-          <a:fontRef idx="minor">
-            <a:schemeClr val="lt1"/>
-          </a:fontRef>
-        </p:style>
-        <p:txBody>
-          <a:bodyPr rtlCol="0" anchor="ctr"/>
-          <a:lstStyle/>
-          <a:p>
-            <a:pPr algn="ctr"/>
-          </a:p>
-        </p:txBody>
-      </p:sp>
-      <p:sp>
-        <p:nvSpPr>
-          <p:cNvPr id="21" name="Oval 20"/>
-          <p:cNvSpPr/>
-          <p:nvPr/>
-        </p:nvSpPr>
-        <p:spPr>
-          <a:xfrm>
-            <a:off x="6428232" y="3867912"/>
-            <a:ext cx="457200" cy="457200"/>
-          </a:xfrm>
-          <a:prstGeom prst="ellipse">
-            <a:avLst/>
-          </a:prstGeom>
-          <a:solidFill>
-            <a:srgbClr val="B23A2A"/>
-          </a:solidFill>
-          <a:ln>
-            <a:noFill/>
-          </a:ln>
-          <a:effectLst/>
-        </p:spPr>
-        <p:style>
-          <a:lnRef idx="1">
-            <a:schemeClr val="accent1"/>
-          </a:lnRef>
-          <a:fillRef idx="3">
-            <a:schemeClr val="accent1"/>
-          </a:fillRef>
-          <a:effectRef idx="2">
-            <a:schemeClr val="accent1"/>
-          </a:effectRef>
-          <a:fontRef idx="minor">
-            <a:schemeClr val="lt1"/>
-          </a:fontRef>
-        </p:style>
-        <p:txBody>
-          <a:bodyPr rtlCol="0" anchor="ctr"/>
-          <a:lstStyle/>
-          <a:p>
-            <a:pPr algn="ctr"/>
-          </a:p>
-        </p:txBody>
-      </p:sp>
-      <p:sp>
-        <p:nvSpPr>
-          <p:cNvPr id="22" name="TextBox 21"/>
-          <p:cNvSpPr txBox="1"/>
-          <p:nvPr/>
-        </p:nvSpPr>
-        <p:spPr>
-          <a:xfrm>
-            <a:off x="6428232" y="3922776"/>
-            <a:ext cx="457200" cy="384048"/>
-          </a:xfrm>
-          <a:prstGeom prst="rect">
-            <a:avLst/>
-          </a:prstGeom>
-          <a:noFill/>
-        </p:spPr>
-        <p:txBody>
-          <a:bodyPr wrap="square" anchor="t" lIns="0" rIns="0" tIns="0" bIns="0">
-            <a:spAutoFit/>
-          </a:bodyPr>
-          <a:lstStyle/>
-          <a:p>
-            <a:pPr algn="ctr"/>
-            <a:r>
-              <a:rPr sz="1600" b="1">
-                <a:solidFill>
-                  <a:srgbClr val="FFFFFF"/>
-                </a:solidFill>
-                <a:latin typeface="微软雅黑"/>
-                <a:ea typeface="微软雅黑"/>
-                <a:cs typeface="微软雅黑"/>
-              </a:rPr>
-              <a:t>4</a:t>
-            </a:r>
-          </a:p>
-        </p:txBody>
-      </p:sp>
-      <p:sp>
-        <p:nvSpPr>
-          <p:cNvPr id="23" name="TextBox 22"/>
-          <p:cNvSpPr txBox="1"/>
-          <p:nvPr/>
-        </p:nvSpPr>
-        <p:spPr>
-          <a:xfrm>
-            <a:off x="6995160" y="3813048"/>
-            <a:ext cx="4434840" cy="457200"/>
-          </a:xfrm>
-          <a:prstGeom prst="rect">
-            <a:avLst/>
-          </a:prstGeom>
-          <a:noFill/>
-        </p:spPr>
-        <p:txBody>
-          <a:bodyPr wrap="square" anchor="t" lIns="0" rIns="0" tIns="0" bIns="0">
-            <a:spAutoFit/>
-          </a:bodyPr>
-          <a:lstStyle/>
-          <a:p>
-            <a:pPr algn="l">
-              <a:lnSpc>
-                <a:spcPct val="110000"/>
-              </a:lnSpc>
-            </a:pPr>
-            <a:r>
-              <a:rPr sz="1600" b="1">
-                <a:solidFill>
-                  <a:srgbClr val="1C2A33"/>
-                </a:solidFill>
-                <a:latin typeface="微软雅黑"/>
-                <a:ea typeface="微软雅黑"/>
-                <a:cs typeface="微软雅黑"/>
-              </a:rPr>
-              <a:t>目标</a:t>
-            </a:r>
-          </a:p>
-        </p:txBody>
-      </p:sp>
-      <p:sp>
-        <p:nvSpPr>
-          <p:cNvPr id="24" name="TextBox 23"/>
-          <p:cNvSpPr txBox="1"/>
-          <p:nvPr/>
-        </p:nvSpPr>
-        <p:spPr>
-          <a:xfrm>
-            <a:off x="6995160" y="4251960"/>
-            <a:ext cx="4434840" cy="1417320"/>
-          </a:xfrm>
-          <a:prstGeom prst="rect">
-            <a:avLst/>
-          </a:prstGeom>
-          <a:noFill/>
-        </p:spPr>
-        <p:txBody>
-          <a:bodyPr wrap="square" anchor="t" lIns="0" rIns="0" tIns="0" bIns="0">
-            <a:spAutoFit/>
-          </a:bodyPr>
-          <a:lstStyle/>
-          <a:p>
-            <a:pPr algn="l">
-              <a:lnSpc>
-                <a:spcPct val="128000"/>
-              </a:lnSpc>
-            </a:pPr>
-            <a:r>
-              <a:rPr sz="1400" b="0">
-                <a:solidFill>
-                  <a:srgbClr val="1C2A33"/>
-                </a:solidFill>
-                <a:latin typeface="楷体"/>
-                <a:ea typeface="楷体"/>
-                <a:cs typeface="楷体"/>
-              </a:rPr>
-              <a:t>科学探究与创新意识：通过模型构建理解有机物空间结构。</a:t>
-            </a:r>
-          </a:p>
-        </p:txBody>
-      </p:sp>
-      <p:sp>
-        <p:nvSpPr>
-          <p:cNvPr id="25" name="TextBox 24"/>
+              <a:t>通过模型构建理解有机物空间结构。</a:t>
+            </a:r>
+          </a:p>
+        </p:txBody>
+      </p:sp>
+      <p:sp>
+        <p:nvSpPr>
+          <p:cNvPr id="14" name="TextBox 13"/>
           <p:cNvSpPr txBox="1"/>
           <p:nvPr/>
         </p:nvSpPr>
@@ -4533,13 +4241,13 @@
             <a:r>
               <a:rPr sz="1300" b="1">
                 <a:solidFill>
-                  <a:srgbClr val="2E7D6B"/>
+                  <a:srgbClr val="B23A2A"/>
                 </a:solidFill>
                 <a:latin typeface="微软雅黑"/>
                 <a:ea typeface="微软雅黑"/>
                 <a:cs typeface="微软雅黑"/>
               </a:rPr>
-              <a:t>课文背景</a:t>
+              <a:t>背景与权威调研</a:t>
             </a:r>
           </a:p>
         </p:txBody>
@@ -4559,7 +4267,7 @@
             <a:avLst/>
           </a:prstGeom>
           <a:solidFill>
-            <a:srgbClr val="2E7D6B"/>
+            <a:srgbClr val="B23A2A"/>
           </a:solidFill>
           <a:ln>
             <a:noFill/>
@@ -4596,8 +4304,8 @@
         </p:nvSpPr>
         <p:spPr>
           <a:xfrm>
-            <a:off x="640080" y="1508760"/>
-            <a:ext cx="6766560" cy="4572000"/>
+            <a:off x="640080" y="1325880"/>
+            <a:ext cx="10911535" cy="548640"/>
           </a:xfrm>
           <a:prstGeom prst="rect">
             <a:avLst/>
@@ -4610,16 +4318,9 @@
           </a:bodyPr>
           <a:lstStyle/>
           <a:p>
-            <a:pPr algn="l">
-              <a:lnSpc>
-                <a:spcPct val="150000"/>
-              </a:lnSpc>
-              <a:spcAft>
-                <a:spcPts val="600"/>
-              </a:spcAft>
-            </a:pPr>
-            <a:r>
-              <a:rPr sz="1600" b="0">
+            <a:pPr algn="l"/>
+            <a:r>
+              <a:rPr sz="2800" b="1">
                 <a:solidFill>
                   <a:srgbClr val="1C2A33"/>
                 </a:solidFill>
@@ -4627,36 +4328,57 @@
                 <a:ea typeface="楷体"/>
                 <a:cs typeface="楷体"/>
               </a:rPr>
-              <a:t>有机物含碳(除CO、CO2、碳酸盐等)。甲烷是最简单有机物，正四面体结构，稳定但光照下与Cl2发生取代反应生成一氯到四氯甲烷。建立同系物、同分异构概念(碳链异构)。</a:t>
-            </a:r>
-          </a:p>
-        </p:txBody>
-      </p:sp>
-      <p:pic>
-        <p:nvPicPr>
-          <p:cNvPr id="6" name="Picture 5" descr="craft.jpg"/>
-          <p:cNvPicPr>
-            <a:picLocks noChangeAspect="1"/>
-          </p:cNvPicPr>
-          <p:nvPr/>
-        </p:nvPicPr>
-        <p:blipFill>
-          <a:blip r:embed="rId2"/>
-          <a:srcRect l="368" r="368"/>
-          <a:stretch>
-            <a:fillRect/>
-          </a:stretch>
-        </p:blipFill>
-        <p:spPr>
-          <a:xfrm>
-            <a:off x="8046720" y="1508760"/>
-            <a:ext cx="4114800" cy="3108960"/>
-          </a:xfrm>
-          <a:prstGeom prst="rect">
-            <a:avLst/>
-          </a:prstGeom>
-        </p:spPr>
-      </p:pic>
+              <a:t>教材定位 · 权威来源</a:t>
+            </a:r>
+          </a:p>
+        </p:txBody>
+      </p:sp>
+      <p:sp>
+        <p:nvSpPr>
+          <p:cNvPr id="6" name="Rounded Rectangle 5"/>
+          <p:cNvSpPr/>
+          <p:nvPr/>
+        </p:nvSpPr>
+        <p:spPr>
+          <a:xfrm>
+            <a:off x="640080" y="2011680"/>
+            <a:ext cx="5227167" cy="4206240"/>
+          </a:xfrm>
+          <a:prstGeom prst="roundRect">
+            <a:avLst/>
+          </a:prstGeom>
+          <a:solidFill>
+            <a:srgbClr val="FFFFFF"/>
+          </a:solidFill>
+          <a:ln w="22860">
+            <a:solidFill>
+              <a:srgbClr val="2E7D6B"/>
+            </a:solidFill>
+          </a:ln>
+          <a:effectLst/>
+        </p:spPr>
+        <p:style>
+          <a:lnRef idx="1">
+            <a:schemeClr val="accent1"/>
+          </a:lnRef>
+          <a:fillRef idx="3">
+            <a:schemeClr val="accent1"/>
+          </a:fillRef>
+          <a:effectRef idx="2">
+            <a:schemeClr val="accent1"/>
+          </a:effectRef>
+          <a:fontRef idx="minor">
+            <a:schemeClr val="lt1"/>
+          </a:fontRef>
+        </p:style>
+        <p:txBody>
+          <a:bodyPr rtlCol="0" anchor="ctr"/>
+          <a:lstStyle/>
+          <a:p>
+            <a:pPr algn="ctr"/>
+          </a:p>
+        </p:txBody>
+      </p:sp>
       <p:sp>
         <p:nvSpPr>
           <p:cNvPr id="7" name="TextBox 6"/>
@@ -4665,8 +4387,8 @@
         </p:nvSpPr>
         <p:spPr>
           <a:xfrm>
-            <a:off x="8046720" y="4663440"/>
-            <a:ext cx="4114800" cy="365760"/>
+            <a:off x="914400" y="2148840"/>
+            <a:ext cx="4678527" cy="457200"/>
           </a:xfrm>
           <a:prstGeom prst="rect">
             <a:avLst/>
@@ -4679,17 +4401,17 @@
           </a:bodyPr>
           <a:lstStyle/>
           <a:p>
-            <a:pPr algn="ctr"/>
-            <a:r>
-              <a:rPr sz="1100" b="0">
-                <a:solidFill>
-                  <a:srgbClr val="6B6258"/>
+            <a:pPr algn="l"/>
+            <a:r>
+              <a:rPr sz="1600" b="1">
+                <a:solidFill>
+                  <a:srgbClr val="2E7D6B"/>
                 </a:solidFill>
                 <a:latin typeface="微软雅黑"/>
                 <a:ea typeface="微软雅黑"/>
                 <a:cs typeface="微软雅黑"/>
               </a:rPr>
-              <a:t>资料图（自由授权，复用 craft.jpg）</a:t>
+              <a:t>教材分析</a:t>
             </a:r>
           </a:p>
         </p:txBody>
@@ -4697,6 +4419,227 @@
       <p:sp>
         <p:nvSpPr>
           <p:cNvPr id="8" name="TextBox 7"/>
+          <p:cNvSpPr txBox="1"/>
+          <p:nvPr/>
+        </p:nvSpPr>
+        <p:spPr>
+          <a:xfrm>
+            <a:off x="914400" y="2651760"/>
+            <a:ext cx="4678527" cy="3383280"/>
+          </a:xfrm>
+          <a:prstGeom prst="rect">
+            <a:avLst/>
+          </a:prstGeom>
+          <a:noFill/>
+        </p:spPr>
+        <p:txBody>
+          <a:bodyPr wrap="square" anchor="t" lIns="0" rIns="0" tIns="0" bIns="0">
+            <a:spAutoFit/>
+          </a:bodyPr>
+          <a:lstStyle/>
+          <a:p>
+            <a:pPr algn="l">
+              <a:lnSpc>
+                <a:spcPct val="155000"/>
+              </a:lnSpc>
+            </a:pPr>
+            <a:r>
+              <a:rPr sz="1400" b="0">
+                <a:solidFill>
+                  <a:srgbClr val="1C2A33"/>
+                </a:solidFill>
+                <a:latin typeface="楷体"/>
+                <a:ea typeface="楷体"/>
+                <a:cs typeface="楷体"/>
+              </a:rPr>
+              <a:t>有机物含碳(除CO、CO2、碳酸盐等)。甲烷是最简单有机物，正四面体结构，稳定但光照下与Cl2发生取代反应生成一氯到四氯甲烷。建立同系物、同分异构概念(碳链异构)。</a:t>
+            </a:r>
+          </a:p>
+        </p:txBody>
+      </p:sp>
+      <p:sp>
+        <p:nvSpPr>
+          <p:cNvPr id="9" name="Rounded Rectangle 8"/>
+          <p:cNvSpPr/>
+          <p:nvPr/>
+        </p:nvSpPr>
+        <p:spPr>
+          <a:xfrm>
+            <a:off x="6324447" y="2011680"/>
+            <a:ext cx="5227167" cy="4206240"/>
+          </a:xfrm>
+          <a:prstGeom prst="roundRect">
+            <a:avLst/>
+          </a:prstGeom>
+          <a:solidFill>
+            <a:srgbClr val="1C2A33"/>
+          </a:solidFill>
+          <a:effectLst/>
+        </p:spPr>
+        <p:style>
+          <a:lnRef idx="1">
+            <a:schemeClr val="accent1"/>
+          </a:lnRef>
+          <a:fillRef idx="3">
+            <a:schemeClr val="accent1"/>
+          </a:fillRef>
+          <a:effectRef idx="2">
+            <a:schemeClr val="accent1"/>
+          </a:effectRef>
+          <a:fontRef idx="minor">
+            <a:schemeClr val="lt1"/>
+          </a:fontRef>
+        </p:style>
+        <p:txBody>
+          <a:bodyPr rtlCol="0" anchor="ctr"/>
+          <a:lstStyle/>
+          <a:p>
+            <a:pPr algn="ctr"/>
+          </a:p>
+        </p:txBody>
+      </p:sp>
+      <p:sp>
+        <p:nvSpPr>
+          <p:cNvPr id="10" name="TextBox 9"/>
+          <p:cNvSpPr txBox="1"/>
+          <p:nvPr/>
+        </p:nvSpPr>
+        <p:spPr>
+          <a:xfrm>
+            <a:off x="6598767" y="2148840"/>
+            <a:ext cx="4678527" cy="457200"/>
+          </a:xfrm>
+          <a:prstGeom prst="rect">
+            <a:avLst/>
+          </a:prstGeom>
+          <a:noFill/>
+        </p:spPr>
+        <p:txBody>
+          <a:bodyPr wrap="square" anchor="t" lIns="0" rIns="0" tIns="0" bIns="0">
+            <a:spAutoFit/>
+          </a:bodyPr>
+          <a:lstStyle/>
+          <a:p>
+            <a:pPr algn="l"/>
+            <a:r>
+              <a:rPr sz="1600" b="1">
+                <a:solidFill>
+                  <a:srgbClr val="C8A86B"/>
+                </a:solidFill>
+                <a:latin typeface="微软雅黑"/>
+                <a:ea typeface="微软雅黑"/>
+                <a:cs typeface="微软雅黑"/>
+              </a:rPr>
+              <a:t>权威来源（已联网核实）</a:t>
+            </a:r>
+          </a:p>
+        </p:txBody>
+      </p:sp>
+      <p:sp>
+        <p:nvSpPr>
+          <p:cNvPr id="11" name="TextBox 10"/>
+          <p:cNvSpPr txBox="1"/>
+          <p:nvPr/>
+        </p:nvSpPr>
+        <p:spPr>
+          <a:xfrm>
+            <a:off x="6598767" y="2651760"/>
+            <a:ext cx="4678527" cy="3383280"/>
+          </a:xfrm>
+          <a:prstGeom prst="rect">
+            <a:avLst/>
+          </a:prstGeom>
+          <a:noFill/>
+        </p:spPr>
+        <p:txBody>
+          <a:bodyPr wrap="square" anchor="t" lIns="0" rIns="0" tIns="0" bIns="0">
+            <a:spAutoFit/>
+          </a:bodyPr>
+          <a:lstStyle/>
+          <a:p>
+            <a:pPr algn="l">
+              <a:lnSpc>
+                <a:spcPct val="145000"/>
+              </a:lnSpc>
+              <a:spcAft>
+                <a:spcPts val="800"/>
+              </a:spcAft>
+            </a:pPr>
+            <a:r>
+              <a:rPr sz="1250" b="0">
+                <a:solidFill>
+                  <a:srgbClr val="FFFFFF"/>
+                </a:solidFill>
+                <a:latin typeface="楷体"/>
+                <a:ea typeface="楷体"/>
+                <a:cs typeface="楷体"/>
+              </a:rPr>
+              <a:t>· OpenStax《有机化学》：甲烷为正四面体，键角109.5°，碳 sp³ 杂化（Linus Pauling, 1931）。</a:t>
+            </a:r>
+          </a:p>
+          <a:p>
+            <a:pPr algn="l">
+              <a:lnSpc>
+                <a:spcPct val="145000"/>
+              </a:lnSpc>
+              <a:spcAft>
+                <a:spcPts val="800"/>
+              </a:spcAft>
+            </a:pPr>
+            <a:r>
+              <a:rPr sz="1250" b="0">
+                <a:solidFill>
+                  <a:srgbClr val="FFFFFF"/>
+                </a:solidFill>
+                <a:latin typeface="楷体"/>
+                <a:ea typeface="楷体"/>
+                <a:cs typeface="楷体"/>
+              </a:rPr>
+              <a:t>· Chemistry LibreTexts：甲烷四根 C–H 键完全等价，是最简单的有机化合物。</a:t>
+            </a:r>
+          </a:p>
+        </p:txBody>
+      </p:sp>
+      <p:sp>
+        <p:nvSpPr>
+          <p:cNvPr id="12" name="TextBox 11"/>
+          <p:cNvSpPr txBox="1"/>
+          <p:nvPr/>
+        </p:nvSpPr>
+        <p:spPr>
+          <a:xfrm>
+            <a:off x="640080" y="5943600"/>
+            <a:ext cx="10911535" cy="365760"/>
+          </a:xfrm>
+          <a:prstGeom prst="rect">
+            <a:avLst/>
+          </a:prstGeom>
+          <a:noFill/>
+        </p:spPr>
+        <p:txBody>
+          <a:bodyPr wrap="square" anchor="t" lIns="0" rIns="0" tIns="0" bIns="0">
+            <a:spAutoFit/>
+          </a:bodyPr>
+          <a:lstStyle/>
+          <a:p>
+            <a:pPr algn="ctr"/>
+            <a:r>
+              <a:rPr sz="1100" b="0">
+                <a:solidFill>
+                  <a:srgbClr val="6B6258"/>
+                </a:solidFill>
+                <a:latin typeface="微软雅黑"/>
+                <a:ea typeface="微软雅黑"/>
+                <a:cs typeface="微软雅黑"/>
+              </a:rPr>
+              <a:t>本课件未使用无关配图（按规范以学科色块呈现）</a:t>
+            </a:r>
+          </a:p>
+        </p:txBody>
+      </p:sp>
+      <p:sp>
+        <p:nvSpPr>
+          <p:cNvPr id="13" name="TextBox 12"/>
           <p:cNvSpPr txBox="1"/>
           <p:nvPr/>
         </p:nvSpPr>
@@ -4829,7 +4772,7 @@
                 <a:ea typeface="微软雅黑"/>
                 <a:cs typeface="微软雅黑"/>
               </a:rPr>
-              <a:t>学习重点</a:t>
+              <a:t>重点</a:t>
             </a:r>
           </a:p>
         </p:txBody>
@@ -4880,14 +4823,51 @@
       </p:sp>
       <p:sp>
         <p:nvSpPr>
-          <p:cNvPr id="5" name="Rounded Rectangle 4"/>
+          <p:cNvPr id="5" name="TextBox 4"/>
+          <p:cNvSpPr txBox="1"/>
+          <p:nvPr/>
+        </p:nvSpPr>
+        <p:spPr>
+          <a:xfrm>
+            <a:off x="640080" y="1325880"/>
+            <a:ext cx="10911535" cy="548640"/>
+          </a:xfrm>
+          <a:prstGeom prst="rect">
+            <a:avLst/>
+          </a:prstGeom>
+          <a:noFill/>
+        </p:spPr>
+        <p:txBody>
+          <a:bodyPr wrap="square" anchor="t" lIns="0" rIns="0" tIns="0" bIns="0">
+            <a:spAutoFit/>
+          </a:bodyPr>
+          <a:lstStyle/>
+          <a:p>
+            <a:pPr algn="l"/>
+            <a:r>
+              <a:rPr sz="3000" b="1">
+                <a:solidFill>
+                  <a:srgbClr val="1C2A33"/>
+                </a:solidFill>
+                <a:latin typeface="楷体"/>
+                <a:ea typeface="楷体"/>
+                <a:cs typeface="楷体"/>
+              </a:rPr>
+              <a:t>本课重点</a:t>
+            </a:r>
+          </a:p>
+        </p:txBody>
+      </p:sp>
+      <p:sp>
+        <p:nvSpPr>
+          <p:cNvPr id="6" name="Rounded Rectangle 5"/>
           <p:cNvSpPr/>
           <p:nvPr/>
         </p:nvSpPr>
         <p:spPr>
           <a:xfrm>
-            <a:off x="640080" y="1371600"/>
-            <a:ext cx="10911535" cy="1170432"/>
+            <a:off x="640080" y="2057400"/>
+            <a:ext cx="5318607" cy="1874519"/>
           </a:xfrm>
           <a:prstGeom prst="roundRect">
             <a:avLst/>
@@ -4895,7 +4875,213 @@
           <a:solidFill>
             <a:srgbClr val="FFFFFF"/>
           </a:solidFill>
-          <a:ln w="22860">
+          <a:ln w="20320">
+            <a:solidFill>
+              <a:srgbClr val="B23A2A"/>
+            </a:solidFill>
+          </a:ln>
+          <a:effectLst/>
+        </p:spPr>
+        <p:style>
+          <a:lnRef idx="1">
+            <a:schemeClr val="accent1"/>
+          </a:lnRef>
+          <a:fillRef idx="3">
+            <a:schemeClr val="accent1"/>
+          </a:fillRef>
+          <a:effectRef idx="2">
+            <a:schemeClr val="accent1"/>
+          </a:effectRef>
+          <a:fontRef idx="minor">
+            <a:schemeClr val="lt1"/>
+          </a:fontRef>
+        </p:style>
+        <p:txBody>
+          <a:bodyPr rtlCol="0" anchor="ctr"/>
+          <a:lstStyle/>
+          <a:p>
+            <a:pPr algn="ctr"/>
+          </a:p>
+        </p:txBody>
+      </p:sp>
+      <p:sp>
+        <p:nvSpPr>
+          <p:cNvPr id="7" name="TextBox 6"/>
+          <p:cNvSpPr txBox="1"/>
+          <p:nvPr/>
+        </p:nvSpPr>
+        <p:spPr>
+          <a:xfrm>
+            <a:off x="868680" y="2221992"/>
+            <a:ext cx="4861407" cy="1545335"/>
+          </a:xfrm>
+          <a:prstGeom prst="rect">
+            <a:avLst/>
+          </a:prstGeom>
+          <a:noFill/>
+        </p:spPr>
+        <p:txBody>
+          <a:bodyPr wrap="square" lIns="0" rIns="0" tIns="0" bIns="0">
+            <a:spAutoFit/>
+          </a:bodyPr>
+          <a:lstStyle/>
+          <a:p>
+            <a:r>
+              <a:rPr sz="1500" b="1">
+                <a:solidFill>
+                  <a:srgbClr val="B23A2A"/>
+                </a:solidFill>
+                <a:latin typeface="微软雅黑"/>
+                <a:ea typeface="微软雅黑"/>
+                <a:cs typeface="微软雅黑"/>
+              </a:rPr>
+              <a:t>① 有机物</a:t>
+            </a:r>
+          </a:p>
+          <a:p>
+            <a:pPr>
+              <a:lnSpc>
+                <a:spcPct val="140000"/>
+              </a:lnSpc>
+              <a:spcBef>
+                <a:spcPts val="500"/>
+              </a:spcBef>
+            </a:pPr>
+            <a:r>
+              <a:rPr sz="1350">
+                <a:solidFill>
+                  <a:srgbClr val="1C2A33"/>
+                </a:solidFill>
+                <a:latin typeface="楷体"/>
+                <a:ea typeface="楷体"/>
+                <a:cs typeface="楷体"/>
+              </a:rPr>
+              <a:t>含碳化合物(除CO/CO2/碳酸盐等)。</a:t>
+            </a:r>
+          </a:p>
+        </p:txBody>
+      </p:sp>
+      <p:sp>
+        <p:nvSpPr>
+          <p:cNvPr id="8" name="Rounded Rectangle 7"/>
+          <p:cNvSpPr/>
+          <p:nvPr/>
+        </p:nvSpPr>
+        <p:spPr>
+          <a:xfrm>
+            <a:off x="6233007" y="2057400"/>
+            <a:ext cx="5318607" cy="1874519"/>
+          </a:xfrm>
+          <a:prstGeom prst="roundRect">
+            <a:avLst/>
+          </a:prstGeom>
+          <a:solidFill>
+            <a:srgbClr val="FFFFFF"/>
+          </a:solidFill>
+          <a:ln w="20320">
+            <a:solidFill>
+              <a:srgbClr val="2E7D6B"/>
+            </a:solidFill>
+          </a:ln>
+          <a:effectLst/>
+        </p:spPr>
+        <p:style>
+          <a:lnRef idx="1">
+            <a:schemeClr val="accent1"/>
+          </a:lnRef>
+          <a:fillRef idx="3">
+            <a:schemeClr val="accent1"/>
+          </a:fillRef>
+          <a:effectRef idx="2">
+            <a:schemeClr val="accent1"/>
+          </a:effectRef>
+          <a:fontRef idx="minor">
+            <a:schemeClr val="lt1"/>
+          </a:fontRef>
+        </p:style>
+        <p:txBody>
+          <a:bodyPr rtlCol="0" anchor="ctr"/>
+          <a:lstStyle/>
+          <a:p>
+            <a:pPr algn="ctr"/>
+          </a:p>
+        </p:txBody>
+      </p:sp>
+      <p:sp>
+        <p:nvSpPr>
+          <p:cNvPr id="9" name="TextBox 8"/>
+          <p:cNvSpPr txBox="1"/>
+          <p:nvPr/>
+        </p:nvSpPr>
+        <p:spPr>
+          <a:xfrm>
+            <a:off x="6461607" y="2221992"/>
+            <a:ext cx="4861407" cy="1545335"/>
+          </a:xfrm>
+          <a:prstGeom prst="rect">
+            <a:avLst/>
+          </a:prstGeom>
+          <a:noFill/>
+        </p:spPr>
+        <p:txBody>
+          <a:bodyPr wrap="square" lIns="0" rIns="0" tIns="0" bIns="0">
+            <a:spAutoFit/>
+          </a:bodyPr>
+          <a:lstStyle/>
+          <a:p>
+            <a:r>
+              <a:rPr sz="1500" b="1">
+                <a:solidFill>
+                  <a:srgbClr val="2E7D6B"/>
+                </a:solidFill>
+                <a:latin typeface="微软雅黑"/>
+                <a:ea typeface="微软雅黑"/>
+                <a:cs typeface="微软雅黑"/>
+              </a:rPr>
+              <a:t>② 甲烷</a:t>
+            </a:r>
+          </a:p>
+          <a:p>
+            <a:pPr>
+              <a:lnSpc>
+                <a:spcPct val="140000"/>
+              </a:lnSpc>
+              <a:spcBef>
+                <a:spcPts val="500"/>
+              </a:spcBef>
+            </a:pPr>
+            <a:r>
+              <a:rPr sz="1350">
+                <a:solidFill>
+                  <a:srgbClr val="1C2A33"/>
+                </a:solidFill>
+                <a:latin typeface="楷体"/>
+                <a:ea typeface="楷体"/>
+                <a:cs typeface="楷体"/>
+              </a:rPr>
+              <a:t>CH4正四面体，C在中心，键角109°28′。</a:t>
+            </a:r>
+          </a:p>
+        </p:txBody>
+      </p:sp>
+      <p:sp>
+        <p:nvSpPr>
+          <p:cNvPr id="10" name="Rounded Rectangle 9"/>
+          <p:cNvSpPr/>
+          <p:nvPr/>
+        </p:nvSpPr>
+        <p:spPr>
+          <a:xfrm>
+            <a:off x="640080" y="4206239"/>
+            <a:ext cx="5318607" cy="1874519"/>
+          </a:xfrm>
+          <a:prstGeom prst="roundRect">
+            <a:avLst/>
+          </a:prstGeom>
+          <a:solidFill>
+            <a:srgbClr val="FFFFFF"/>
+          </a:solidFill>
+          <a:ln w="20320">
             <a:solidFill>
               <a:srgbClr val="C8A86B"/>
             </a:solidFill>
@@ -4926,14 +5112,14 @@
       </p:sp>
       <p:sp>
         <p:nvSpPr>
-          <p:cNvPr id="6" name="TextBox 5"/>
+          <p:cNvPr id="11" name="TextBox 10"/>
           <p:cNvSpPr txBox="1"/>
           <p:nvPr/>
         </p:nvSpPr>
         <p:spPr>
           <a:xfrm>
-            <a:off x="1371600" y="1481328"/>
-            <a:ext cx="9997135" cy="457200"/>
+            <a:off x="868680" y="4370831"/>
+            <a:ext cx="4861407" cy="1545335"/>
           </a:xfrm>
           <a:prstGeom prst="rect">
             <a:avLst/>
@@ -4941,59 +5127,34 @@
           <a:noFill/>
         </p:spPr>
         <p:txBody>
-          <a:bodyPr wrap="square" anchor="t" lIns="0" rIns="0" tIns="0" bIns="0">
+          <a:bodyPr wrap="square" lIns="0" rIns="0" tIns="0" bIns="0">
             <a:spAutoFit/>
           </a:bodyPr>
           <a:lstStyle/>
           <a:p>
-            <a:pPr algn="l">
-              <a:lnSpc>
-                <a:spcPct val="110000"/>
-              </a:lnSpc>
-            </a:pPr>
-            <a:r>
-              <a:rPr sz="1600" b="1">
-                <a:solidFill>
-                  <a:srgbClr val="1C2A33"/>
+            <a:r>
+              <a:rPr sz="1500" b="1">
+                <a:solidFill>
+                  <a:srgbClr val="C8A86B"/>
                 </a:solidFill>
                 <a:latin typeface="微软雅黑"/>
                 <a:ea typeface="微软雅黑"/>
                 <a:cs typeface="微软雅黑"/>
               </a:rPr>
-              <a:t/>
-            </a:r>
-          </a:p>
-        </p:txBody>
-      </p:sp>
-      <p:sp>
-        <p:nvSpPr>
-          <p:cNvPr id="7" name="TextBox 6"/>
-          <p:cNvSpPr txBox="1"/>
-          <p:nvPr/>
-        </p:nvSpPr>
-        <p:spPr>
-          <a:xfrm>
-            <a:off x="1371600" y="1920240"/>
-            <a:ext cx="9997135" cy="530352"/>
-          </a:xfrm>
-          <a:prstGeom prst="rect">
-            <a:avLst/>
-          </a:prstGeom>
-          <a:noFill/>
-        </p:spPr>
-        <p:txBody>
-          <a:bodyPr wrap="square" anchor="t" lIns="0" rIns="0" tIns="0" bIns="0">
-            <a:spAutoFit/>
-          </a:bodyPr>
-          <a:lstStyle/>
-          <a:p>
-            <a:pPr algn="l">
+              <a:t>③ 取代</a:t>
+            </a:r>
+          </a:p>
+          <a:p>
+            <a:pPr>
               <a:lnSpc>
-                <a:spcPct val="128000"/>
+                <a:spcPct val="140000"/>
               </a:lnSpc>
+              <a:spcBef>
+                <a:spcPts val="500"/>
+              </a:spcBef>
             </a:pPr>
             <a:r>
-              <a:rPr sz="1300" b="0">
+              <a:rPr sz="1350">
                 <a:solidFill>
                   <a:srgbClr val="1C2A33"/>
                 </a:solidFill>
@@ -5001,21 +5162,21 @@
                 <a:ea typeface="楷体"/>
                 <a:cs typeface="楷体"/>
               </a:rPr>
-              <a:t>① 有机物：含碳化合物(除CO/CO2/碳酸盐等)。</a:t>
-            </a:r>
-          </a:p>
-        </p:txBody>
-      </p:sp>
-      <p:sp>
-        <p:nvSpPr>
-          <p:cNvPr id="8" name="Rounded Rectangle 7"/>
+              <a:t>CH4+Cl2→CH3Cl+HCl(光照)，逐步取代。</a:t>
+            </a:r>
+          </a:p>
+        </p:txBody>
+      </p:sp>
+      <p:sp>
+        <p:nvSpPr>
+          <p:cNvPr id="12" name="Rounded Rectangle 11"/>
           <p:cNvSpPr/>
           <p:nvPr/>
         </p:nvSpPr>
         <p:spPr>
           <a:xfrm>
-            <a:off x="640080" y="2651760"/>
-            <a:ext cx="10911535" cy="1170432"/>
+            <a:off x="6233007" y="4206239"/>
+            <a:ext cx="5318607" cy="1874519"/>
           </a:xfrm>
           <a:prstGeom prst="roundRect">
             <a:avLst/>
@@ -5023,9 +5184,9 @@
           <a:solidFill>
             <a:srgbClr val="FFFFFF"/>
           </a:solidFill>
-          <a:ln w="22860">
+          <a:ln w="20320">
             <a:solidFill>
-              <a:srgbClr val="C8A86B"/>
+              <a:srgbClr val="6B6258"/>
             </a:solidFill>
           </a:ln>
           <a:effectLst/>
@@ -5054,14 +5215,14 @@
       </p:sp>
       <p:sp>
         <p:nvSpPr>
-          <p:cNvPr id="9" name="TextBox 8"/>
+          <p:cNvPr id="13" name="TextBox 12"/>
           <p:cNvSpPr txBox="1"/>
           <p:nvPr/>
         </p:nvSpPr>
         <p:spPr>
           <a:xfrm>
-            <a:off x="1371600" y="2761488"/>
-            <a:ext cx="9997135" cy="457200"/>
+            <a:off x="6461607" y="4370831"/>
+            <a:ext cx="4861407" cy="1545335"/>
           </a:xfrm>
           <a:prstGeom prst="rect">
             <a:avLst/>
@@ -5069,59 +5230,34 @@
           <a:noFill/>
         </p:spPr>
         <p:txBody>
-          <a:bodyPr wrap="square" anchor="t" lIns="0" rIns="0" tIns="0" bIns="0">
+          <a:bodyPr wrap="square" lIns="0" rIns="0" tIns="0" bIns="0">
             <a:spAutoFit/>
           </a:bodyPr>
           <a:lstStyle/>
           <a:p>
-            <a:pPr algn="l">
-              <a:lnSpc>
-                <a:spcPct val="110000"/>
-              </a:lnSpc>
-            </a:pPr>
-            <a:r>
-              <a:rPr sz="1600" b="1">
-                <a:solidFill>
-                  <a:srgbClr val="1C2A33"/>
+            <a:r>
+              <a:rPr sz="1500" b="1">
+                <a:solidFill>
+                  <a:srgbClr val="6B6258"/>
                 </a:solidFill>
                 <a:latin typeface="微软雅黑"/>
                 <a:ea typeface="微软雅黑"/>
                 <a:cs typeface="微软雅黑"/>
               </a:rPr>
-              <a:t/>
-            </a:r>
-          </a:p>
-        </p:txBody>
-      </p:sp>
-      <p:sp>
-        <p:nvSpPr>
-          <p:cNvPr id="10" name="TextBox 9"/>
-          <p:cNvSpPr txBox="1"/>
-          <p:nvPr/>
-        </p:nvSpPr>
-        <p:spPr>
-          <a:xfrm>
-            <a:off x="1371600" y="3200400"/>
-            <a:ext cx="9997135" cy="530352"/>
-          </a:xfrm>
-          <a:prstGeom prst="rect">
-            <a:avLst/>
-          </a:prstGeom>
-          <a:noFill/>
-        </p:spPr>
-        <p:txBody>
-          <a:bodyPr wrap="square" anchor="t" lIns="0" rIns="0" tIns="0" bIns="0">
-            <a:spAutoFit/>
-          </a:bodyPr>
-          <a:lstStyle/>
-          <a:p>
-            <a:pPr algn="l">
+              <a:t>④ 同分异构</a:t>
+            </a:r>
+          </a:p>
+          <a:p>
+            <a:pPr>
               <a:lnSpc>
-                <a:spcPct val="128000"/>
+                <a:spcPct val="140000"/>
               </a:lnSpc>
+              <a:spcBef>
+                <a:spcPts val="500"/>
+              </a:spcBef>
             </a:pPr>
             <a:r>
-              <a:rPr sz="1300" b="0">
+              <a:rPr sz="1350">
                 <a:solidFill>
                   <a:srgbClr val="1C2A33"/>
                 </a:solidFill>
@@ -5129,270 +5265,14 @@
                 <a:ea typeface="楷体"/>
                 <a:cs typeface="楷体"/>
               </a:rPr>
-              <a:t>② 甲烷：CH4正四面体，C在中心，键角109°28′。</a:t>
-            </a:r>
-          </a:p>
-        </p:txBody>
-      </p:sp>
-      <p:sp>
-        <p:nvSpPr>
-          <p:cNvPr id="11" name="Rounded Rectangle 10"/>
-          <p:cNvSpPr/>
-          <p:nvPr/>
-        </p:nvSpPr>
-        <p:spPr>
-          <a:xfrm>
-            <a:off x="640080" y="3931920"/>
-            <a:ext cx="10911535" cy="1170432"/>
-          </a:xfrm>
-          <a:prstGeom prst="roundRect">
-            <a:avLst/>
-          </a:prstGeom>
-          <a:solidFill>
-            <a:srgbClr val="FFFFFF"/>
-          </a:solidFill>
-          <a:ln w="22860">
-            <a:solidFill>
-              <a:srgbClr val="C8A86B"/>
-            </a:solidFill>
-          </a:ln>
-          <a:effectLst/>
-        </p:spPr>
-        <p:style>
-          <a:lnRef idx="1">
-            <a:schemeClr val="accent1"/>
-          </a:lnRef>
-          <a:fillRef idx="3">
-            <a:schemeClr val="accent1"/>
-          </a:fillRef>
-          <a:effectRef idx="2">
-            <a:schemeClr val="accent1"/>
-          </a:effectRef>
-          <a:fontRef idx="minor">
-            <a:schemeClr val="lt1"/>
-          </a:fontRef>
-        </p:style>
-        <p:txBody>
-          <a:bodyPr rtlCol="0" anchor="ctr"/>
-          <a:lstStyle/>
-          <a:p>
-            <a:pPr algn="ctr"/>
-          </a:p>
-        </p:txBody>
-      </p:sp>
-      <p:sp>
-        <p:nvSpPr>
-          <p:cNvPr id="12" name="TextBox 11"/>
-          <p:cNvSpPr txBox="1"/>
-          <p:nvPr/>
-        </p:nvSpPr>
-        <p:spPr>
-          <a:xfrm>
-            <a:off x="1371600" y="4041648"/>
-            <a:ext cx="9997135" cy="457200"/>
-          </a:xfrm>
-          <a:prstGeom prst="rect">
-            <a:avLst/>
-          </a:prstGeom>
-          <a:noFill/>
-        </p:spPr>
-        <p:txBody>
-          <a:bodyPr wrap="square" anchor="t" lIns="0" rIns="0" tIns="0" bIns="0">
-            <a:spAutoFit/>
-          </a:bodyPr>
-          <a:lstStyle/>
-          <a:p>
-            <a:pPr algn="l">
-              <a:lnSpc>
-                <a:spcPct val="110000"/>
-              </a:lnSpc>
-            </a:pPr>
-            <a:r>
-              <a:rPr sz="1600" b="1">
-                <a:solidFill>
-                  <a:srgbClr val="1C2A33"/>
-                </a:solidFill>
-                <a:latin typeface="微软雅黑"/>
-                <a:ea typeface="微软雅黑"/>
-                <a:cs typeface="微软雅黑"/>
-              </a:rPr>
-              <a:t/>
-            </a:r>
-          </a:p>
-        </p:txBody>
-      </p:sp>
-      <p:sp>
-        <p:nvSpPr>
-          <p:cNvPr id="13" name="TextBox 12"/>
-          <p:cNvSpPr txBox="1"/>
-          <p:nvPr/>
-        </p:nvSpPr>
-        <p:spPr>
-          <a:xfrm>
-            <a:off x="1371600" y="4480560"/>
-            <a:ext cx="9997135" cy="530352"/>
-          </a:xfrm>
-          <a:prstGeom prst="rect">
-            <a:avLst/>
-          </a:prstGeom>
-          <a:noFill/>
-        </p:spPr>
-        <p:txBody>
-          <a:bodyPr wrap="square" anchor="t" lIns="0" rIns="0" tIns="0" bIns="0">
-            <a:spAutoFit/>
-          </a:bodyPr>
-          <a:lstStyle/>
-          <a:p>
-            <a:pPr algn="l">
-              <a:lnSpc>
-                <a:spcPct val="128000"/>
-              </a:lnSpc>
-            </a:pPr>
-            <a:r>
-              <a:rPr sz="1300" b="0">
-                <a:solidFill>
-                  <a:srgbClr val="1C2A33"/>
-                </a:solidFill>
-                <a:latin typeface="楷体"/>
-                <a:ea typeface="楷体"/>
-                <a:cs typeface="楷体"/>
-              </a:rPr>
-              <a:t>③ 取代：CH4+Cl2→CH3Cl+HCl(光照)，逐步取代。</a:t>
-            </a:r>
-          </a:p>
-        </p:txBody>
-      </p:sp>
-      <p:sp>
-        <p:nvSpPr>
-          <p:cNvPr id="14" name="Rounded Rectangle 13"/>
-          <p:cNvSpPr/>
-          <p:nvPr/>
-        </p:nvSpPr>
-        <p:spPr>
-          <a:xfrm>
-            <a:off x="640080" y="5212080"/>
-            <a:ext cx="10911535" cy="1170432"/>
-          </a:xfrm>
-          <a:prstGeom prst="roundRect">
-            <a:avLst/>
-          </a:prstGeom>
-          <a:solidFill>
-            <a:srgbClr val="FFFFFF"/>
-          </a:solidFill>
-          <a:ln w="22860">
-            <a:solidFill>
-              <a:srgbClr val="C8A86B"/>
-            </a:solidFill>
-          </a:ln>
-          <a:effectLst/>
-        </p:spPr>
-        <p:style>
-          <a:lnRef idx="1">
-            <a:schemeClr val="accent1"/>
-          </a:lnRef>
-          <a:fillRef idx="3">
-            <a:schemeClr val="accent1"/>
-          </a:fillRef>
-          <a:effectRef idx="2">
-            <a:schemeClr val="accent1"/>
-          </a:effectRef>
-          <a:fontRef idx="minor">
-            <a:schemeClr val="lt1"/>
-          </a:fontRef>
-        </p:style>
-        <p:txBody>
-          <a:bodyPr rtlCol="0" anchor="ctr"/>
-          <a:lstStyle/>
-          <a:p>
-            <a:pPr algn="ctr"/>
-          </a:p>
-        </p:txBody>
-      </p:sp>
-      <p:sp>
-        <p:nvSpPr>
-          <p:cNvPr id="15" name="TextBox 14"/>
-          <p:cNvSpPr txBox="1"/>
-          <p:nvPr/>
-        </p:nvSpPr>
-        <p:spPr>
-          <a:xfrm>
-            <a:off x="1371600" y="5321808"/>
-            <a:ext cx="9997135" cy="457200"/>
-          </a:xfrm>
-          <a:prstGeom prst="rect">
-            <a:avLst/>
-          </a:prstGeom>
-          <a:noFill/>
-        </p:spPr>
-        <p:txBody>
-          <a:bodyPr wrap="square" anchor="t" lIns="0" rIns="0" tIns="0" bIns="0">
-            <a:spAutoFit/>
-          </a:bodyPr>
-          <a:lstStyle/>
-          <a:p>
-            <a:pPr algn="l">
-              <a:lnSpc>
-                <a:spcPct val="110000"/>
-              </a:lnSpc>
-            </a:pPr>
-            <a:r>
-              <a:rPr sz="1600" b="1">
-                <a:solidFill>
-                  <a:srgbClr val="1C2A33"/>
-                </a:solidFill>
-                <a:latin typeface="微软雅黑"/>
-                <a:ea typeface="微软雅黑"/>
-                <a:cs typeface="微软雅黑"/>
-              </a:rPr>
-              <a:t/>
-            </a:r>
-          </a:p>
-        </p:txBody>
-      </p:sp>
-      <p:sp>
-        <p:nvSpPr>
-          <p:cNvPr id="16" name="TextBox 15"/>
-          <p:cNvSpPr txBox="1"/>
-          <p:nvPr/>
-        </p:nvSpPr>
-        <p:spPr>
-          <a:xfrm>
-            <a:off x="1371600" y="5760720"/>
-            <a:ext cx="9997135" cy="530352"/>
-          </a:xfrm>
-          <a:prstGeom prst="rect">
-            <a:avLst/>
-          </a:prstGeom>
-          <a:noFill/>
-        </p:spPr>
-        <p:txBody>
-          <a:bodyPr wrap="square" anchor="t" lIns="0" rIns="0" tIns="0" bIns="0">
-            <a:spAutoFit/>
-          </a:bodyPr>
-          <a:lstStyle/>
-          <a:p>
-            <a:pPr algn="l">
-              <a:lnSpc>
-                <a:spcPct val="128000"/>
-              </a:lnSpc>
-            </a:pPr>
-            <a:r>
-              <a:rPr sz="1300" b="0">
-                <a:solidFill>
-                  <a:srgbClr val="1C2A33"/>
-                </a:solidFill>
-                <a:latin typeface="楷体"/>
-                <a:ea typeface="楷体"/>
-                <a:cs typeface="楷体"/>
-              </a:rPr>
-              <a:t>④ 同分异构：分子式同结构异(如正丁烷/异丁烷)。</a:t>
-            </a:r>
-          </a:p>
-        </p:txBody>
-      </p:sp>
-      <p:sp>
-        <p:nvSpPr>
-          <p:cNvPr id="17" name="TextBox 16"/>
+              <a:t>分子式同结构异(如正丁烷/异丁烷)。</a:t>
+            </a:r>
+          </a:p>
+        </p:txBody>
+      </p:sp>
+      <p:sp>
+        <p:nvSpPr>
+          <p:cNvPr id="14" name="TextBox 13"/>
           <p:cNvSpPr txBox="1"/>
           <p:nvPr/>
         </p:nvSpPr>
@@ -5519,13 +5399,13 @@
             <a:r>
               <a:rPr sz="1300" b="1">
                 <a:solidFill>
-                  <a:srgbClr val="2E7D6B"/>
+                  <a:srgbClr val="B23A2A"/>
                 </a:solidFill>
                 <a:latin typeface="微软雅黑"/>
                 <a:ea typeface="微软雅黑"/>
                 <a:cs typeface="微软雅黑"/>
               </a:rPr>
-              <a:t>学习路径</a:t>
+              <a:t>方法</a:t>
             </a:r>
           </a:p>
         </p:txBody>
@@ -5545,7 +5425,7 @@
             <a:avLst/>
           </a:prstGeom>
           <a:solidFill>
-            <a:srgbClr val="2E7D6B"/>
+            <a:srgbClr val="B23A2A"/>
           </a:solidFill>
           <a:ln>
             <a:noFill/>
@@ -5576,14 +5456,51 @@
       </p:sp>
       <p:sp>
         <p:nvSpPr>
-          <p:cNvPr id="5" name="Rounded Rectangle 4"/>
+          <p:cNvPr id="5" name="TextBox 4"/>
+          <p:cNvSpPr txBox="1"/>
+          <p:nvPr/>
+        </p:nvSpPr>
+        <p:spPr>
+          <a:xfrm>
+            <a:off x="640080" y="1325880"/>
+            <a:ext cx="10911535" cy="548640"/>
+          </a:xfrm>
+          <a:prstGeom prst="rect">
+            <a:avLst/>
+          </a:prstGeom>
+          <a:noFill/>
+        </p:spPr>
+        <p:txBody>
+          <a:bodyPr wrap="square" anchor="t" lIns="0" rIns="0" tIns="0" bIns="0">
+            <a:spAutoFit/>
+          </a:bodyPr>
+          <a:lstStyle/>
+          <a:p>
+            <a:pPr algn="l"/>
+            <a:r>
+              <a:rPr sz="3000" b="1">
+                <a:solidFill>
+                  <a:srgbClr val="1C2A33"/>
+                </a:solidFill>
+                <a:latin typeface="楷体"/>
+                <a:ea typeface="楷体"/>
+                <a:cs typeface="楷体"/>
+              </a:rPr>
+              <a:t>学习方法建议</a:t>
+            </a:r>
+          </a:p>
+        </p:txBody>
+      </p:sp>
+      <p:sp>
+        <p:nvSpPr>
+          <p:cNvPr id="6" name="Rounded Rectangle 5"/>
           <p:cNvSpPr/>
           <p:nvPr/>
         </p:nvSpPr>
         <p:spPr>
           <a:xfrm>
-            <a:off x="640080" y="1371600"/>
-            <a:ext cx="10911535" cy="685800"/>
+            <a:off x="640080" y="2057400"/>
+            <a:ext cx="5318607" cy="1874519"/>
           </a:xfrm>
           <a:prstGeom prst="roundRect">
             <a:avLst/>
@@ -5591,7 +5508,110 @@
           <a:solidFill>
             <a:srgbClr val="FFFFFF"/>
           </a:solidFill>
-          <a:ln w="22860">
+          <a:ln w="20320">
+            <a:solidFill>
+              <a:srgbClr val="B23A2A"/>
+            </a:solidFill>
+          </a:ln>
+          <a:effectLst/>
+        </p:spPr>
+        <p:style>
+          <a:lnRef idx="1">
+            <a:schemeClr val="accent1"/>
+          </a:lnRef>
+          <a:fillRef idx="3">
+            <a:schemeClr val="accent1"/>
+          </a:fillRef>
+          <a:effectRef idx="2">
+            <a:schemeClr val="accent1"/>
+          </a:effectRef>
+          <a:fontRef idx="minor">
+            <a:schemeClr val="lt1"/>
+          </a:fontRef>
+        </p:style>
+        <p:txBody>
+          <a:bodyPr rtlCol="0" anchor="ctr"/>
+          <a:lstStyle/>
+          <a:p>
+            <a:pPr algn="ctr"/>
+          </a:p>
+        </p:txBody>
+      </p:sp>
+      <p:sp>
+        <p:nvSpPr>
+          <p:cNvPr id="7" name="TextBox 6"/>
+          <p:cNvSpPr txBox="1"/>
+          <p:nvPr/>
+        </p:nvSpPr>
+        <p:spPr>
+          <a:xfrm>
+            <a:off x="868680" y="2221992"/>
+            <a:ext cx="4861407" cy="1545335"/>
+          </a:xfrm>
+          <a:prstGeom prst="rect">
+            <a:avLst/>
+          </a:prstGeom>
+          <a:noFill/>
+        </p:spPr>
+        <p:txBody>
+          <a:bodyPr wrap="square" lIns="0" rIns="0" tIns="0" bIns="0">
+            <a:spAutoFit/>
+          </a:bodyPr>
+          <a:lstStyle/>
+          <a:p>
+            <a:r>
+              <a:rPr sz="1500" b="1">
+                <a:solidFill>
+                  <a:srgbClr val="B23A2A"/>
+                </a:solidFill>
+                <a:latin typeface="微软雅黑"/>
+                <a:ea typeface="微软雅黑"/>
+                <a:cs typeface="微软雅黑"/>
+              </a:rPr>
+              <a:t>球棍模型</a:t>
+            </a:r>
+          </a:p>
+          <a:p>
+            <a:pPr>
+              <a:lnSpc>
+                <a:spcPct val="140000"/>
+              </a:lnSpc>
+              <a:spcBef>
+                <a:spcPts val="500"/>
+              </a:spcBef>
+            </a:pPr>
+            <a:r>
+              <a:rPr sz="1300">
+                <a:solidFill>
+                  <a:srgbClr val="1C2A33"/>
+                </a:solidFill>
+                <a:latin typeface="楷体"/>
+                <a:ea typeface="楷体"/>
+                <a:cs typeface="楷体"/>
+              </a:rPr>
+              <a:t>动手搭球棍模型，直观感受分子空间结构。</a:t>
+            </a:r>
+          </a:p>
+        </p:txBody>
+      </p:sp>
+      <p:sp>
+        <p:nvSpPr>
+          <p:cNvPr id="8" name="Rounded Rectangle 7"/>
+          <p:cNvSpPr/>
+          <p:nvPr/>
+        </p:nvSpPr>
+        <p:spPr>
+          <a:xfrm>
+            <a:off x="6233007" y="2057400"/>
+            <a:ext cx="5318607" cy="1874519"/>
+          </a:xfrm>
+          <a:prstGeom prst="roundRect">
+            <a:avLst/>
+          </a:prstGeom>
+          <a:solidFill>
+            <a:srgbClr val="FFFFFF"/>
+          </a:solidFill>
+          <a:ln w="20320">
             <a:solidFill>
               <a:srgbClr val="2E7D6B"/>
             </a:solidFill>
@@ -5622,23 +5642,82 @@
       </p:sp>
       <p:sp>
         <p:nvSpPr>
-          <p:cNvPr id="6" name="Oval 5"/>
+          <p:cNvPr id="9" name="TextBox 8"/>
+          <p:cNvSpPr txBox="1"/>
+          <p:nvPr/>
+        </p:nvSpPr>
+        <p:spPr>
+          <a:xfrm>
+            <a:off x="6461607" y="2221992"/>
+            <a:ext cx="4861407" cy="1545335"/>
+          </a:xfrm>
+          <a:prstGeom prst="rect">
+            <a:avLst/>
+          </a:prstGeom>
+          <a:noFill/>
+        </p:spPr>
+        <p:txBody>
+          <a:bodyPr wrap="square" lIns="0" rIns="0" tIns="0" bIns="0">
+            <a:spAutoFit/>
+          </a:bodyPr>
+          <a:lstStyle/>
+          <a:p>
+            <a:r>
+              <a:rPr sz="1500" b="1">
+                <a:solidFill>
+                  <a:srgbClr val="2E7D6B"/>
+                </a:solidFill>
+                <a:latin typeface="微软雅黑"/>
+                <a:ea typeface="微软雅黑"/>
+                <a:cs typeface="微软雅黑"/>
+              </a:rPr>
+              <a:t>实验(光照取代)</a:t>
+            </a:r>
+          </a:p>
+          <a:p>
+            <a:pPr>
+              <a:lnSpc>
+                <a:spcPct val="140000"/>
+              </a:lnSpc>
+              <a:spcBef>
+                <a:spcPts val="500"/>
+              </a:spcBef>
+            </a:pPr>
+            <a:r>
+              <a:rPr sz="1300">
+                <a:solidFill>
+                  <a:srgbClr val="1C2A33"/>
+                </a:solidFill>
+                <a:latin typeface="楷体"/>
+                <a:ea typeface="楷体"/>
+                <a:cs typeface="楷体"/>
+              </a:rPr>
+              <a:t>重视实验现象，从观察中归纳物质性质。</a:t>
+            </a:r>
+          </a:p>
+        </p:txBody>
+      </p:sp>
+      <p:sp>
+        <p:nvSpPr>
+          <p:cNvPr id="10" name="Rounded Rectangle 9"/>
           <p:cNvSpPr/>
           <p:nvPr/>
         </p:nvSpPr>
         <p:spPr>
           <a:xfrm>
-            <a:off x="804672" y="1536192"/>
-            <a:ext cx="457200" cy="457200"/>
-          </a:xfrm>
-          <a:prstGeom prst="ellipse">
+            <a:off x="640080" y="4206239"/>
+            <a:ext cx="5318607" cy="1874519"/>
+          </a:xfrm>
+          <a:prstGeom prst="roundRect">
             <a:avLst/>
           </a:prstGeom>
           <a:solidFill>
-            <a:srgbClr val="2E7D6B"/>
+            <a:srgbClr val="FFFFFF"/>
           </a:solidFill>
-          <a:ln>
-            <a:noFill/>
+          <a:ln w="20320">
+            <a:solidFill>
+              <a:srgbClr val="C8A86B"/>
+            </a:solidFill>
           </a:ln>
           <a:effectLst/>
         </p:spPr>
@@ -5666,14 +5745,14 @@
       </p:sp>
       <p:sp>
         <p:nvSpPr>
-          <p:cNvPr id="7" name="TextBox 6"/>
+          <p:cNvPr id="11" name="TextBox 10"/>
           <p:cNvSpPr txBox="1"/>
           <p:nvPr/>
         </p:nvSpPr>
         <p:spPr>
           <a:xfrm>
-            <a:off x="804672" y="1591056"/>
-            <a:ext cx="457200" cy="384048"/>
+            <a:off x="868680" y="4370831"/>
+            <a:ext cx="4861407" cy="1545335"/>
           </a:xfrm>
           <a:prstGeom prst="rect">
             <a:avLst/>
@@ -5681,77 +5760,56 @@
           <a:noFill/>
         </p:spPr>
         <p:txBody>
-          <a:bodyPr wrap="square" anchor="t" lIns="0" rIns="0" tIns="0" bIns="0">
+          <a:bodyPr wrap="square" lIns="0" rIns="0" tIns="0" bIns="0">
             <a:spAutoFit/>
           </a:bodyPr>
           <a:lstStyle/>
           <a:p>
-            <a:pPr algn="ctr"/>
-            <a:r>
-              <a:rPr sz="1600" b="1">
-                <a:solidFill>
-                  <a:srgbClr val="FFFFFF"/>
+            <a:r>
+              <a:rPr sz="1500" b="1">
+                <a:solidFill>
+                  <a:srgbClr val="C8A86B"/>
                 </a:solidFill>
                 <a:latin typeface="微软雅黑"/>
                 <a:ea typeface="微软雅黑"/>
                 <a:cs typeface="微软雅黑"/>
               </a:rPr>
-              <a:t>1</a:t>
-            </a:r>
-          </a:p>
-        </p:txBody>
-      </p:sp>
-      <p:sp>
-        <p:nvSpPr>
-          <p:cNvPr id="8" name="TextBox 7"/>
-          <p:cNvSpPr txBox="1"/>
-          <p:nvPr/>
-        </p:nvSpPr>
-        <p:spPr>
-          <a:xfrm>
-            <a:off x="1371600" y="1481328"/>
-            <a:ext cx="9997135" cy="484632"/>
-          </a:xfrm>
-          <a:prstGeom prst="rect">
-            <a:avLst/>
-          </a:prstGeom>
-          <a:noFill/>
-        </p:spPr>
-        <p:txBody>
-          <a:bodyPr wrap="square" anchor="t" lIns="0" rIns="0" tIns="0" bIns="0">
-            <a:spAutoFit/>
-          </a:bodyPr>
-          <a:lstStyle/>
-          <a:p>
-            <a:pPr algn="l">
+              <a:t>对比(取代/置换)</a:t>
+            </a:r>
+          </a:p>
+          <a:p>
+            <a:pPr>
               <a:lnSpc>
-                <a:spcPct val="110000"/>
+                <a:spcPct val="140000"/>
               </a:lnSpc>
+              <a:spcBef>
+                <a:spcPts val="500"/>
+              </a:spcBef>
             </a:pPr>
             <a:r>
-              <a:rPr sz="1600" b="1">
+              <a:rPr sz="1300">
                 <a:solidFill>
                   <a:srgbClr val="1C2A33"/>
                 </a:solidFill>
-                <a:latin typeface="微软雅黑"/>
-                <a:ea typeface="微软雅黑"/>
-                <a:cs typeface="微软雅黑"/>
-              </a:rPr>
-              <a:t>Step 1 导入</a:t>
-            </a:r>
-          </a:p>
-        </p:txBody>
-      </p:sp>
-      <p:sp>
-        <p:nvSpPr>
-          <p:cNvPr id="9" name="Rounded Rectangle 8"/>
+                <a:latin typeface="楷体"/>
+                <a:ea typeface="楷体"/>
+                <a:cs typeface="楷体"/>
+              </a:rPr>
+              <a:t>用对比表区分易混概念，理清差异。</a:t>
+            </a:r>
+          </a:p>
+        </p:txBody>
+      </p:sp>
+      <p:sp>
+        <p:nvSpPr>
+          <p:cNvPr id="12" name="Rounded Rectangle 11"/>
           <p:cNvSpPr/>
           <p:nvPr/>
         </p:nvSpPr>
         <p:spPr>
           <a:xfrm>
-            <a:off x="640080" y="2194560"/>
-            <a:ext cx="10911535" cy="685800"/>
+            <a:off x="6233007" y="4206239"/>
+            <a:ext cx="5318607" cy="1874519"/>
           </a:xfrm>
           <a:prstGeom prst="roundRect">
             <a:avLst/>
@@ -5759,9 +5817,9 @@
           <a:solidFill>
             <a:srgbClr val="FFFFFF"/>
           </a:solidFill>
-          <a:ln w="22860">
+          <a:ln w="20320">
             <a:solidFill>
-              <a:srgbClr val="2E7D6B"/>
+              <a:srgbClr val="6B6258"/>
             </a:solidFill>
           </a:ln>
           <a:effectLst/>
@@ -5790,58 +5848,14 @@
       </p:sp>
       <p:sp>
         <p:nvSpPr>
-          <p:cNvPr id="10" name="Oval 9"/>
-          <p:cNvSpPr/>
-          <p:nvPr/>
-        </p:nvSpPr>
-        <p:spPr>
-          <a:xfrm>
-            <a:off x="804672" y="2359152"/>
-            <a:ext cx="457200" cy="457200"/>
-          </a:xfrm>
-          <a:prstGeom prst="ellipse">
-            <a:avLst/>
-          </a:prstGeom>
-          <a:solidFill>
-            <a:srgbClr val="2E7D6B"/>
-          </a:solidFill>
-          <a:ln>
-            <a:noFill/>
-          </a:ln>
-          <a:effectLst/>
-        </p:spPr>
-        <p:style>
-          <a:lnRef idx="1">
-            <a:schemeClr val="accent1"/>
-          </a:lnRef>
-          <a:fillRef idx="3">
-            <a:schemeClr val="accent1"/>
-          </a:fillRef>
-          <a:effectRef idx="2">
-            <a:schemeClr val="accent1"/>
-          </a:effectRef>
-          <a:fontRef idx="minor">
-            <a:schemeClr val="lt1"/>
-          </a:fontRef>
-        </p:style>
-        <p:txBody>
-          <a:bodyPr rtlCol="0" anchor="ctr"/>
-          <a:lstStyle/>
-          <a:p>
-            <a:pPr algn="ctr"/>
-          </a:p>
-        </p:txBody>
-      </p:sp>
-      <p:sp>
-        <p:nvSpPr>
-          <p:cNvPr id="11" name="TextBox 10"/>
+          <p:cNvPr id="13" name="TextBox 12"/>
           <p:cNvSpPr txBox="1"/>
           <p:nvPr/>
         </p:nvSpPr>
         <p:spPr>
           <a:xfrm>
-            <a:off x="804672" y="2414016"/>
-            <a:ext cx="457200" cy="384048"/>
+            <a:off x="6461607" y="4370831"/>
+            <a:ext cx="4861407" cy="1545335"/>
           </a:xfrm>
           <a:prstGeom prst="rect">
             <a:avLst/>
@@ -5849,742 +5863,49 @@
           <a:noFill/>
         </p:spPr>
         <p:txBody>
-          <a:bodyPr wrap="square" anchor="t" lIns="0" rIns="0" tIns="0" bIns="0">
+          <a:bodyPr wrap="square" lIns="0" rIns="0" tIns="0" bIns="0">
             <a:spAutoFit/>
           </a:bodyPr>
           <a:lstStyle/>
           <a:p>
-            <a:pPr algn="ctr"/>
-            <a:r>
-              <a:rPr sz="1600" b="1">
-                <a:solidFill>
-                  <a:srgbClr val="FFFFFF"/>
+            <a:r>
+              <a:rPr sz="1500" b="1">
+                <a:solidFill>
+                  <a:srgbClr val="6B6258"/>
                 </a:solidFill>
                 <a:latin typeface="微软雅黑"/>
                 <a:ea typeface="微软雅黑"/>
                 <a:cs typeface="微软雅黑"/>
               </a:rPr>
-              <a:t>2</a:t>
-            </a:r>
-          </a:p>
-        </p:txBody>
-      </p:sp>
-      <p:sp>
-        <p:nvSpPr>
-          <p:cNvPr id="12" name="TextBox 11"/>
-          <p:cNvSpPr txBox="1"/>
-          <p:nvPr/>
-        </p:nvSpPr>
-        <p:spPr>
-          <a:xfrm>
-            <a:off x="1371600" y="2304288"/>
-            <a:ext cx="9997135" cy="484632"/>
-          </a:xfrm>
-          <a:prstGeom prst="rect">
-            <a:avLst/>
-          </a:prstGeom>
-          <a:noFill/>
-        </p:spPr>
-        <p:txBody>
-          <a:bodyPr wrap="square" anchor="t" lIns="0" rIns="0" tIns="0" bIns="0">
-            <a:spAutoFit/>
-          </a:bodyPr>
-          <a:lstStyle/>
-          <a:p>
-            <a:pPr algn="l">
+              <a:t>结构分析</a:t>
+            </a:r>
+          </a:p>
+          <a:p>
+            <a:pPr>
               <a:lnSpc>
-                <a:spcPct val="110000"/>
+                <a:spcPct val="140000"/>
               </a:lnSpc>
+              <a:spcBef>
+                <a:spcPts val="500"/>
+              </a:spcBef>
             </a:pPr>
             <a:r>
-              <a:rPr sz="1600" b="1">
+              <a:rPr sz="1300">
                 <a:solidFill>
                   <a:srgbClr val="1C2A33"/>
                 </a:solidFill>
-                <a:latin typeface="微软雅黑"/>
-                <a:ea typeface="微软雅黑"/>
-                <a:cs typeface="微软雅黑"/>
-              </a:rPr>
-              <a:t>Step 2 甲烷结构</a:t>
-            </a:r>
-          </a:p>
-        </p:txBody>
-      </p:sp>
-      <p:sp>
-        <p:nvSpPr>
-          <p:cNvPr id="13" name="Rounded Rectangle 12"/>
-          <p:cNvSpPr/>
-          <p:nvPr/>
-        </p:nvSpPr>
-        <p:spPr>
-          <a:xfrm>
-            <a:off x="640080" y="3017520"/>
-            <a:ext cx="10911535" cy="685800"/>
-          </a:xfrm>
-          <a:prstGeom prst="roundRect">
-            <a:avLst/>
-          </a:prstGeom>
-          <a:solidFill>
-            <a:srgbClr val="FFFFFF"/>
-          </a:solidFill>
-          <a:ln w="22860">
-            <a:solidFill>
-              <a:srgbClr val="2E7D6B"/>
-            </a:solidFill>
-          </a:ln>
-          <a:effectLst/>
-        </p:spPr>
-        <p:style>
-          <a:lnRef idx="1">
-            <a:schemeClr val="accent1"/>
-          </a:lnRef>
-          <a:fillRef idx="3">
-            <a:schemeClr val="accent1"/>
-          </a:fillRef>
-          <a:effectRef idx="2">
-            <a:schemeClr val="accent1"/>
-          </a:effectRef>
-          <a:fontRef idx="minor">
-            <a:schemeClr val="lt1"/>
-          </a:fontRef>
-        </p:style>
-        <p:txBody>
-          <a:bodyPr rtlCol="0" anchor="ctr"/>
-          <a:lstStyle/>
-          <a:p>
-            <a:pPr algn="ctr"/>
-          </a:p>
-        </p:txBody>
-      </p:sp>
-      <p:sp>
-        <p:nvSpPr>
-          <p:cNvPr id="14" name="Oval 13"/>
-          <p:cNvSpPr/>
-          <p:nvPr/>
-        </p:nvSpPr>
-        <p:spPr>
-          <a:xfrm>
-            <a:off x="804672" y="3182112"/>
-            <a:ext cx="457200" cy="457200"/>
-          </a:xfrm>
-          <a:prstGeom prst="ellipse">
-            <a:avLst/>
-          </a:prstGeom>
-          <a:solidFill>
-            <a:srgbClr val="2E7D6B"/>
-          </a:solidFill>
-          <a:ln>
-            <a:noFill/>
-          </a:ln>
-          <a:effectLst/>
-        </p:spPr>
-        <p:style>
-          <a:lnRef idx="1">
-            <a:schemeClr val="accent1"/>
-          </a:lnRef>
-          <a:fillRef idx="3">
-            <a:schemeClr val="accent1"/>
-          </a:fillRef>
-          <a:effectRef idx="2">
-            <a:schemeClr val="accent1"/>
-          </a:effectRef>
-          <a:fontRef idx="minor">
-            <a:schemeClr val="lt1"/>
-          </a:fontRef>
-        </p:style>
-        <p:txBody>
-          <a:bodyPr rtlCol="0" anchor="ctr"/>
-          <a:lstStyle/>
-          <a:p>
-            <a:pPr algn="ctr"/>
-          </a:p>
-        </p:txBody>
-      </p:sp>
-      <p:sp>
-        <p:nvSpPr>
-          <p:cNvPr id="15" name="TextBox 14"/>
-          <p:cNvSpPr txBox="1"/>
-          <p:nvPr/>
-        </p:nvSpPr>
-        <p:spPr>
-          <a:xfrm>
-            <a:off x="804672" y="3236976"/>
-            <a:ext cx="457200" cy="384048"/>
-          </a:xfrm>
-          <a:prstGeom prst="rect">
-            <a:avLst/>
-          </a:prstGeom>
-          <a:noFill/>
-        </p:spPr>
-        <p:txBody>
-          <a:bodyPr wrap="square" anchor="t" lIns="0" rIns="0" tIns="0" bIns="0">
-            <a:spAutoFit/>
-          </a:bodyPr>
-          <a:lstStyle/>
-          <a:p>
-            <a:pPr algn="ctr"/>
-            <a:r>
-              <a:rPr sz="1600" b="1">
-                <a:solidFill>
-                  <a:srgbClr val="FFFFFF"/>
-                </a:solidFill>
-                <a:latin typeface="微软雅黑"/>
-                <a:ea typeface="微软雅黑"/>
-                <a:cs typeface="微软雅黑"/>
-              </a:rPr>
-              <a:t>3</a:t>
-            </a:r>
-          </a:p>
-        </p:txBody>
-      </p:sp>
-      <p:sp>
-        <p:nvSpPr>
-          <p:cNvPr id="16" name="TextBox 15"/>
-          <p:cNvSpPr txBox="1"/>
-          <p:nvPr/>
-        </p:nvSpPr>
-        <p:spPr>
-          <a:xfrm>
-            <a:off x="1371600" y="3127248"/>
-            <a:ext cx="9997135" cy="484632"/>
-          </a:xfrm>
-          <a:prstGeom prst="rect">
-            <a:avLst/>
-          </a:prstGeom>
-          <a:noFill/>
-        </p:spPr>
-        <p:txBody>
-          <a:bodyPr wrap="square" anchor="t" lIns="0" rIns="0" tIns="0" bIns="0">
-            <a:spAutoFit/>
-          </a:bodyPr>
-          <a:lstStyle/>
-          <a:p>
-            <a:pPr algn="l">
-              <a:lnSpc>
-                <a:spcPct val="110000"/>
-              </a:lnSpc>
-            </a:pPr>
-            <a:r>
-              <a:rPr sz="1600" b="1">
-                <a:solidFill>
-                  <a:srgbClr val="1C2A33"/>
-                </a:solidFill>
-                <a:latin typeface="微软雅黑"/>
-                <a:ea typeface="微软雅黑"/>
-                <a:cs typeface="微软雅黑"/>
-              </a:rPr>
-              <a:t>Step 3 取代反应</a:t>
-            </a:r>
-          </a:p>
-        </p:txBody>
-      </p:sp>
-      <p:sp>
-        <p:nvSpPr>
-          <p:cNvPr id="17" name="Rounded Rectangle 16"/>
-          <p:cNvSpPr/>
-          <p:nvPr/>
-        </p:nvSpPr>
-        <p:spPr>
-          <a:xfrm>
-            <a:off x="640080" y="3840480"/>
-            <a:ext cx="10911535" cy="685800"/>
-          </a:xfrm>
-          <a:prstGeom prst="roundRect">
-            <a:avLst/>
-          </a:prstGeom>
-          <a:solidFill>
-            <a:srgbClr val="FFFFFF"/>
-          </a:solidFill>
-          <a:ln w="22860">
-            <a:solidFill>
-              <a:srgbClr val="2E7D6B"/>
-            </a:solidFill>
-          </a:ln>
-          <a:effectLst/>
-        </p:spPr>
-        <p:style>
-          <a:lnRef idx="1">
-            <a:schemeClr val="accent1"/>
-          </a:lnRef>
-          <a:fillRef idx="3">
-            <a:schemeClr val="accent1"/>
-          </a:fillRef>
-          <a:effectRef idx="2">
-            <a:schemeClr val="accent1"/>
-          </a:effectRef>
-          <a:fontRef idx="minor">
-            <a:schemeClr val="lt1"/>
-          </a:fontRef>
-        </p:style>
-        <p:txBody>
-          <a:bodyPr rtlCol="0" anchor="ctr"/>
-          <a:lstStyle/>
-          <a:p>
-            <a:pPr algn="ctr"/>
-          </a:p>
-        </p:txBody>
-      </p:sp>
-      <p:sp>
-        <p:nvSpPr>
-          <p:cNvPr id="18" name="Oval 17"/>
-          <p:cNvSpPr/>
-          <p:nvPr/>
-        </p:nvSpPr>
-        <p:spPr>
-          <a:xfrm>
-            <a:off x="804672" y="4005072"/>
-            <a:ext cx="457200" cy="457200"/>
-          </a:xfrm>
-          <a:prstGeom prst="ellipse">
-            <a:avLst/>
-          </a:prstGeom>
-          <a:solidFill>
-            <a:srgbClr val="2E7D6B"/>
-          </a:solidFill>
-          <a:ln>
-            <a:noFill/>
-          </a:ln>
-          <a:effectLst/>
-        </p:spPr>
-        <p:style>
-          <a:lnRef idx="1">
-            <a:schemeClr val="accent1"/>
-          </a:lnRef>
-          <a:fillRef idx="3">
-            <a:schemeClr val="accent1"/>
-          </a:fillRef>
-          <a:effectRef idx="2">
-            <a:schemeClr val="accent1"/>
-          </a:effectRef>
-          <a:fontRef idx="minor">
-            <a:schemeClr val="lt1"/>
-          </a:fontRef>
-        </p:style>
-        <p:txBody>
-          <a:bodyPr rtlCol="0" anchor="ctr"/>
-          <a:lstStyle/>
-          <a:p>
-            <a:pPr algn="ctr"/>
-          </a:p>
-        </p:txBody>
-      </p:sp>
-      <p:sp>
-        <p:nvSpPr>
-          <p:cNvPr id="19" name="TextBox 18"/>
-          <p:cNvSpPr txBox="1"/>
-          <p:nvPr/>
-        </p:nvSpPr>
-        <p:spPr>
-          <a:xfrm>
-            <a:off x="804672" y="4059936"/>
-            <a:ext cx="457200" cy="384048"/>
-          </a:xfrm>
-          <a:prstGeom prst="rect">
-            <a:avLst/>
-          </a:prstGeom>
-          <a:noFill/>
-        </p:spPr>
-        <p:txBody>
-          <a:bodyPr wrap="square" anchor="t" lIns="0" rIns="0" tIns="0" bIns="0">
-            <a:spAutoFit/>
-          </a:bodyPr>
-          <a:lstStyle/>
-          <a:p>
-            <a:pPr algn="ctr"/>
-            <a:r>
-              <a:rPr sz="1600" b="1">
-                <a:solidFill>
-                  <a:srgbClr val="FFFFFF"/>
-                </a:solidFill>
-                <a:latin typeface="微软雅黑"/>
-                <a:ea typeface="微软雅黑"/>
-                <a:cs typeface="微软雅黑"/>
-              </a:rPr>
-              <a:t>4</a:t>
-            </a:r>
-          </a:p>
-        </p:txBody>
-      </p:sp>
-      <p:sp>
-        <p:nvSpPr>
-          <p:cNvPr id="20" name="TextBox 19"/>
-          <p:cNvSpPr txBox="1"/>
-          <p:nvPr/>
-        </p:nvSpPr>
-        <p:spPr>
-          <a:xfrm>
-            <a:off x="1371600" y="3950208"/>
-            <a:ext cx="9997135" cy="484632"/>
-          </a:xfrm>
-          <a:prstGeom prst="rect">
-            <a:avLst/>
-          </a:prstGeom>
-          <a:noFill/>
-        </p:spPr>
-        <p:txBody>
-          <a:bodyPr wrap="square" anchor="t" lIns="0" rIns="0" tIns="0" bIns="0">
-            <a:spAutoFit/>
-          </a:bodyPr>
-          <a:lstStyle/>
-          <a:p>
-            <a:pPr algn="l">
-              <a:lnSpc>
-                <a:spcPct val="110000"/>
-              </a:lnSpc>
-            </a:pPr>
-            <a:r>
-              <a:rPr sz="1600" b="1">
-                <a:solidFill>
-                  <a:srgbClr val="1C2A33"/>
-                </a:solidFill>
-                <a:latin typeface="微软雅黑"/>
-                <a:ea typeface="微软雅黑"/>
-                <a:cs typeface="微软雅黑"/>
-              </a:rPr>
-              <a:t>Step 4 取代产物</a:t>
-            </a:r>
-          </a:p>
-        </p:txBody>
-      </p:sp>
-      <p:sp>
-        <p:nvSpPr>
-          <p:cNvPr id="21" name="Rounded Rectangle 20"/>
-          <p:cNvSpPr/>
-          <p:nvPr/>
-        </p:nvSpPr>
-        <p:spPr>
-          <a:xfrm>
-            <a:off x="640080" y="4663440"/>
-            <a:ext cx="10911535" cy="685800"/>
-          </a:xfrm>
-          <a:prstGeom prst="roundRect">
-            <a:avLst/>
-          </a:prstGeom>
-          <a:solidFill>
-            <a:srgbClr val="FFFFFF"/>
-          </a:solidFill>
-          <a:ln w="22860">
-            <a:solidFill>
-              <a:srgbClr val="2E7D6B"/>
-            </a:solidFill>
-          </a:ln>
-          <a:effectLst/>
-        </p:spPr>
-        <p:style>
-          <a:lnRef idx="1">
-            <a:schemeClr val="accent1"/>
-          </a:lnRef>
-          <a:fillRef idx="3">
-            <a:schemeClr val="accent1"/>
-          </a:fillRef>
-          <a:effectRef idx="2">
-            <a:schemeClr val="accent1"/>
-          </a:effectRef>
-          <a:fontRef idx="minor">
-            <a:schemeClr val="lt1"/>
-          </a:fontRef>
-        </p:style>
-        <p:txBody>
-          <a:bodyPr rtlCol="0" anchor="ctr"/>
-          <a:lstStyle/>
-          <a:p>
-            <a:pPr algn="ctr"/>
-          </a:p>
-        </p:txBody>
-      </p:sp>
-      <p:sp>
-        <p:nvSpPr>
-          <p:cNvPr id="22" name="Oval 21"/>
-          <p:cNvSpPr/>
-          <p:nvPr/>
-        </p:nvSpPr>
-        <p:spPr>
-          <a:xfrm>
-            <a:off x="804672" y="4828032"/>
-            <a:ext cx="457200" cy="457200"/>
-          </a:xfrm>
-          <a:prstGeom prst="ellipse">
-            <a:avLst/>
-          </a:prstGeom>
-          <a:solidFill>
-            <a:srgbClr val="2E7D6B"/>
-          </a:solidFill>
-          <a:ln>
-            <a:noFill/>
-          </a:ln>
-          <a:effectLst/>
-        </p:spPr>
-        <p:style>
-          <a:lnRef idx="1">
-            <a:schemeClr val="accent1"/>
-          </a:lnRef>
-          <a:fillRef idx="3">
-            <a:schemeClr val="accent1"/>
-          </a:fillRef>
-          <a:effectRef idx="2">
-            <a:schemeClr val="accent1"/>
-          </a:effectRef>
-          <a:fontRef idx="minor">
-            <a:schemeClr val="lt1"/>
-          </a:fontRef>
-        </p:style>
-        <p:txBody>
-          <a:bodyPr rtlCol="0" anchor="ctr"/>
-          <a:lstStyle/>
-          <a:p>
-            <a:pPr algn="ctr"/>
-          </a:p>
-        </p:txBody>
-      </p:sp>
-      <p:sp>
-        <p:nvSpPr>
-          <p:cNvPr id="23" name="TextBox 22"/>
-          <p:cNvSpPr txBox="1"/>
-          <p:nvPr/>
-        </p:nvSpPr>
-        <p:spPr>
-          <a:xfrm>
-            <a:off x="804672" y="4882896"/>
-            <a:ext cx="457200" cy="384048"/>
-          </a:xfrm>
-          <a:prstGeom prst="rect">
-            <a:avLst/>
-          </a:prstGeom>
-          <a:noFill/>
-        </p:spPr>
-        <p:txBody>
-          <a:bodyPr wrap="square" anchor="t" lIns="0" rIns="0" tIns="0" bIns="0">
-            <a:spAutoFit/>
-          </a:bodyPr>
-          <a:lstStyle/>
-          <a:p>
-            <a:pPr algn="ctr"/>
-            <a:r>
-              <a:rPr sz="1600" b="1">
-                <a:solidFill>
-                  <a:srgbClr val="FFFFFF"/>
-                </a:solidFill>
-                <a:latin typeface="微软雅黑"/>
-                <a:ea typeface="微软雅黑"/>
-                <a:cs typeface="微软雅黑"/>
-              </a:rPr>
-              <a:t>5</a:t>
-            </a:r>
-          </a:p>
-        </p:txBody>
-      </p:sp>
-      <p:sp>
-        <p:nvSpPr>
-          <p:cNvPr id="24" name="TextBox 23"/>
-          <p:cNvSpPr txBox="1"/>
-          <p:nvPr/>
-        </p:nvSpPr>
-        <p:spPr>
-          <a:xfrm>
-            <a:off x="1371600" y="4773168"/>
-            <a:ext cx="9997135" cy="484632"/>
-          </a:xfrm>
-          <a:prstGeom prst="rect">
-            <a:avLst/>
-          </a:prstGeom>
-          <a:noFill/>
-        </p:spPr>
-        <p:txBody>
-          <a:bodyPr wrap="square" anchor="t" lIns="0" rIns="0" tIns="0" bIns="0">
-            <a:spAutoFit/>
-          </a:bodyPr>
-          <a:lstStyle/>
-          <a:p>
-            <a:pPr algn="l">
-              <a:lnSpc>
-                <a:spcPct val="110000"/>
-              </a:lnSpc>
-            </a:pPr>
-            <a:r>
-              <a:rPr sz="1600" b="1">
-                <a:solidFill>
-                  <a:srgbClr val="1C2A33"/>
-                </a:solidFill>
-                <a:latin typeface="微软雅黑"/>
-                <a:ea typeface="微软雅黑"/>
-                <a:cs typeface="微软雅黑"/>
-              </a:rPr>
-              <a:t>Step 5 同分异构</a:t>
-            </a:r>
-          </a:p>
-        </p:txBody>
-      </p:sp>
-      <p:sp>
-        <p:nvSpPr>
-          <p:cNvPr id="25" name="Rounded Rectangle 24"/>
-          <p:cNvSpPr/>
-          <p:nvPr/>
-        </p:nvSpPr>
-        <p:spPr>
-          <a:xfrm>
-            <a:off x="640080" y="5486400"/>
-            <a:ext cx="10911535" cy="685800"/>
-          </a:xfrm>
-          <a:prstGeom prst="roundRect">
-            <a:avLst/>
-          </a:prstGeom>
-          <a:solidFill>
-            <a:srgbClr val="FFFFFF"/>
-          </a:solidFill>
-          <a:ln w="22860">
-            <a:solidFill>
-              <a:srgbClr val="2E7D6B"/>
-            </a:solidFill>
-          </a:ln>
-          <a:effectLst/>
-        </p:spPr>
-        <p:style>
-          <a:lnRef idx="1">
-            <a:schemeClr val="accent1"/>
-          </a:lnRef>
-          <a:fillRef idx="3">
-            <a:schemeClr val="accent1"/>
-          </a:fillRef>
-          <a:effectRef idx="2">
-            <a:schemeClr val="accent1"/>
-          </a:effectRef>
-          <a:fontRef idx="minor">
-            <a:schemeClr val="lt1"/>
-          </a:fontRef>
-        </p:style>
-        <p:txBody>
-          <a:bodyPr rtlCol="0" anchor="ctr"/>
-          <a:lstStyle/>
-          <a:p>
-            <a:pPr algn="ctr"/>
-          </a:p>
-        </p:txBody>
-      </p:sp>
-      <p:sp>
-        <p:nvSpPr>
-          <p:cNvPr id="26" name="Oval 25"/>
-          <p:cNvSpPr/>
-          <p:nvPr/>
-        </p:nvSpPr>
-        <p:spPr>
-          <a:xfrm>
-            <a:off x="804672" y="5650992"/>
-            <a:ext cx="457200" cy="457200"/>
-          </a:xfrm>
-          <a:prstGeom prst="ellipse">
-            <a:avLst/>
-          </a:prstGeom>
-          <a:solidFill>
-            <a:srgbClr val="2E7D6B"/>
-          </a:solidFill>
-          <a:ln>
-            <a:noFill/>
-          </a:ln>
-          <a:effectLst/>
-        </p:spPr>
-        <p:style>
-          <a:lnRef idx="1">
-            <a:schemeClr val="accent1"/>
-          </a:lnRef>
-          <a:fillRef idx="3">
-            <a:schemeClr val="accent1"/>
-          </a:fillRef>
-          <a:effectRef idx="2">
-            <a:schemeClr val="accent1"/>
-          </a:effectRef>
-          <a:fontRef idx="minor">
-            <a:schemeClr val="lt1"/>
-          </a:fontRef>
-        </p:style>
-        <p:txBody>
-          <a:bodyPr rtlCol="0" anchor="ctr"/>
-          <a:lstStyle/>
-          <a:p>
-            <a:pPr algn="ctr"/>
-          </a:p>
-        </p:txBody>
-      </p:sp>
-      <p:sp>
-        <p:nvSpPr>
-          <p:cNvPr id="27" name="TextBox 26"/>
-          <p:cNvSpPr txBox="1"/>
-          <p:nvPr/>
-        </p:nvSpPr>
-        <p:spPr>
-          <a:xfrm>
-            <a:off x="804672" y="5705856"/>
-            <a:ext cx="457200" cy="384048"/>
-          </a:xfrm>
-          <a:prstGeom prst="rect">
-            <a:avLst/>
-          </a:prstGeom>
-          <a:noFill/>
-        </p:spPr>
-        <p:txBody>
-          <a:bodyPr wrap="square" anchor="t" lIns="0" rIns="0" tIns="0" bIns="0">
-            <a:spAutoFit/>
-          </a:bodyPr>
-          <a:lstStyle/>
-          <a:p>
-            <a:pPr algn="ctr"/>
-            <a:r>
-              <a:rPr sz="1600" b="1">
-                <a:solidFill>
-                  <a:srgbClr val="FFFFFF"/>
-                </a:solidFill>
-                <a:latin typeface="微软雅黑"/>
-                <a:ea typeface="微软雅黑"/>
-                <a:cs typeface="微软雅黑"/>
-              </a:rPr>
-              <a:t>6</a:t>
-            </a:r>
-          </a:p>
-        </p:txBody>
-      </p:sp>
-      <p:sp>
-        <p:nvSpPr>
-          <p:cNvPr id="28" name="TextBox 27"/>
-          <p:cNvSpPr txBox="1"/>
-          <p:nvPr/>
-        </p:nvSpPr>
-        <p:spPr>
-          <a:xfrm>
-            <a:off x="1371600" y="5596128"/>
-            <a:ext cx="9997135" cy="484632"/>
-          </a:xfrm>
-          <a:prstGeom prst="rect">
-            <a:avLst/>
-          </a:prstGeom>
-          <a:noFill/>
-        </p:spPr>
-        <p:txBody>
-          <a:bodyPr wrap="square" anchor="t" lIns="0" rIns="0" tIns="0" bIns="0">
-            <a:spAutoFit/>
-          </a:bodyPr>
-          <a:lstStyle/>
-          <a:p>
-            <a:pPr algn="l">
-              <a:lnSpc>
-                <a:spcPct val="110000"/>
-              </a:lnSpc>
-            </a:pPr>
-            <a:r>
-              <a:rPr sz="1600" b="1">
-                <a:solidFill>
-                  <a:srgbClr val="1C2A33"/>
-                </a:solidFill>
-                <a:latin typeface="微软雅黑"/>
-                <a:ea typeface="微软雅黑"/>
-                <a:cs typeface="微软雅黑"/>
-              </a:rPr>
-              <a:t>Step 6 练习+作业</a:t>
-            </a:r>
-          </a:p>
-        </p:txBody>
-      </p:sp>
-      <p:sp>
-        <p:nvSpPr>
-          <p:cNvPr id="29" name="TextBox 28"/>
+                <a:latin typeface="楷体"/>
+                <a:ea typeface="楷体"/>
+                <a:cs typeface="楷体"/>
+              </a:rPr>
+              <a:t>做结构分析，弄清断键与成键位置。</a:t>
+            </a:r>
+          </a:p>
+        </p:txBody>
+      </p:sp>
+      <p:sp>
+        <p:nvSpPr>
+          <p:cNvPr id="14" name="TextBox 13"/>
           <p:cNvSpPr txBox="1"/>
           <p:nvPr/>
         </p:nvSpPr>
@@ -6717,7 +6038,7 @@
                 <a:ea typeface="微软雅黑"/>
                 <a:cs typeface="微软雅黑"/>
               </a:rPr>
-              <a:t>易混易错</a:t>
+              <a:t>难点</a:t>
             </a:r>
           </a:p>
         </p:txBody>
@@ -6768,14 +6089,51 @@
       </p:sp>
       <p:sp>
         <p:nvSpPr>
-          <p:cNvPr id="5" name="Rounded Rectangle 4"/>
+          <p:cNvPr id="5" name="TextBox 4"/>
+          <p:cNvSpPr txBox="1"/>
+          <p:nvPr/>
+        </p:nvSpPr>
+        <p:spPr>
+          <a:xfrm>
+            <a:off x="640080" y="1325880"/>
+            <a:ext cx="10911535" cy="548640"/>
+          </a:xfrm>
+          <a:prstGeom prst="rect">
+            <a:avLst/>
+          </a:prstGeom>
+          <a:noFill/>
+        </p:spPr>
+        <p:txBody>
+          <a:bodyPr wrap="square" anchor="t" lIns="0" rIns="0" tIns="0" bIns="0">
+            <a:spAutoFit/>
+          </a:bodyPr>
+          <a:lstStyle/>
+          <a:p>
+            <a:pPr algn="l"/>
+            <a:r>
+              <a:rPr sz="3000" b="1">
+                <a:solidFill>
+                  <a:srgbClr val="1C2A33"/>
+                </a:solidFill>
+                <a:latin typeface="楷体"/>
+                <a:ea typeface="楷体"/>
+                <a:cs typeface="楷体"/>
+              </a:rPr>
+              <a:t>易错与突破</a:t>
+            </a:r>
+          </a:p>
+        </p:txBody>
+      </p:sp>
+      <p:sp>
+        <p:nvSpPr>
+          <p:cNvPr id="6" name="Rounded Rectangle 5"/>
           <p:cNvSpPr/>
           <p:nvPr/>
         </p:nvSpPr>
         <p:spPr>
           <a:xfrm>
-            <a:off x="640080" y="1417320"/>
-            <a:ext cx="5349240" cy="2057400"/>
+            <a:off x="640080" y="2103120"/>
+            <a:ext cx="3393338" cy="3657600"/>
           </a:xfrm>
           <a:prstGeom prst="roundRect">
             <a:avLst/>
@@ -6783,7 +6141,7 @@
           <a:solidFill>
             <a:srgbClr val="FFFFFF"/>
           </a:solidFill>
-          <a:ln w="22860">
+          <a:ln w="20320">
             <a:solidFill>
               <a:srgbClr val="B23A2A"/>
             </a:solidFill>
@@ -6814,23 +6172,82 @@
       </p:sp>
       <p:sp>
         <p:nvSpPr>
-          <p:cNvPr id="6" name="Oval 5"/>
+          <p:cNvPr id="7" name="TextBox 6"/>
+          <p:cNvSpPr txBox="1"/>
+          <p:nvPr/>
+        </p:nvSpPr>
+        <p:spPr>
+          <a:xfrm>
+            <a:off x="868680" y="2267712"/>
+            <a:ext cx="2936138" cy="3328416"/>
+          </a:xfrm>
+          <a:prstGeom prst="rect">
+            <a:avLst/>
+          </a:prstGeom>
+          <a:noFill/>
+        </p:spPr>
+        <p:txBody>
+          <a:bodyPr wrap="square" lIns="0" rIns="0" tIns="0" bIns="0">
+            <a:spAutoFit/>
+          </a:bodyPr>
+          <a:lstStyle/>
+          <a:p>
+            <a:r>
+              <a:rPr sz="1500" b="1">
+                <a:solidFill>
+                  <a:srgbClr val="B23A2A"/>
+                </a:solidFill>
+                <a:latin typeface="微软雅黑"/>
+                <a:ea typeface="微软雅黑"/>
+                <a:cs typeface="微软雅黑"/>
+              </a:rPr>
+              <a:t>取代vs置换</a:t>
+            </a:r>
+          </a:p>
+          <a:p>
+            <a:pPr>
+              <a:lnSpc>
+                <a:spcPct val="140000"/>
+              </a:lnSpc>
+              <a:spcBef>
+                <a:spcPts val="500"/>
+              </a:spcBef>
+            </a:pPr>
+            <a:r>
+              <a:rPr sz="1250">
+                <a:solidFill>
+                  <a:srgbClr val="1C2A33"/>
+                </a:solidFill>
+                <a:latin typeface="楷体"/>
+                <a:ea typeface="楷体"/>
+                <a:cs typeface="楷体"/>
+              </a:rPr>
+              <a:t>原因：取代无单质生成、分步，与置换(单质+化合物→新单质+新化合物)不同，易混。</a:t>
+            </a:r>
+          </a:p>
+        </p:txBody>
+      </p:sp>
+      <p:sp>
+        <p:nvSpPr>
+          <p:cNvPr id="8" name="Rounded Rectangle 7"/>
           <p:cNvSpPr/>
           <p:nvPr/>
         </p:nvSpPr>
         <p:spPr>
           <a:xfrm>
-            <a:off x="804672" y="1581912"/>
-            <a:ext cx="457200" cy="457200"/>
-          </a:xfrm>
-          <a:prstGeom prst="ellipse">
+            <a:off x="4399178" y="2103120"/>
+            <a:ext cx="3393338" cy="3657600"/>
+          </a:xfrm>
+          <a:prstGeom prst="roundRect">
             <a:avLst/>
           </a:prstGeom>
           <a:solidFill>
-            <a:srgbClr val="B23A2A"/>
+            <a:srgbClr val="FFFFFF"/>
           </a:solidFill>
-          <a:ln>
-            <a:noFill/>
+          <a:ln w="20320">
+            <a:solidFill>
+              <a:srgbClr val="2E7D6B"/>
+            </a:solidFill>
           </a:ln>
           <a:effectLst/>
         </p:spPr>
@@ -6858,14 +6275,14 @@
       </p:sp>
       <p:sp>
         <p:nvSpPr>
-          <p:cNvPr id="7" name="TextBox 6"/>
+          <p:cNvPr id="9" name="TextBox 8"/>
           <p:cNvSpPr txBox="1"/>
           <p:nvPr/>
         </p:nvSpPr>
         <p:spPr>
           <a:xfrm>
-            <a:off x="804672" y="1636776"/>
-            <a:ext cx="457200" cy="384048"/>
+            <a:off x="4627778" y="2267712"/>
+            <a:ext cx="2936138" cy="3328416"/>
           </a:xfrm>
           <a:prstGeom prst="rect">
             <a:avLst/>
@@ -6873,96 +6290,34 @@
           <a:noFill/>
         </p:spPr>
         <p:txBody>
-          <a:bodyPr wrap="square" anchor="t" lIns="0" rIns="0" tIns="0" bIns="0">
+          <a:bodyPr wrap="square" lIns="0" rIns="0" tIns="0" bIns="0">
             <a:spAutoFit/>
           </a:bodyPr>
           <a:lstStyle/>
           <a:p>
-            <a:pPr algn="ctr"/>
-            <a:r>
-              <a:rPr sz="1600" b="1">
-                <a:solidFill>
-                  <a:srgbClr val="FFFFFF"/>
+            <a:r>
+              <a:rPr sz="1500" b="1">
+                <a:solidFill>
+                  <a:srgbClr val="2E7D6B"/>
                 </a:solidFill>
                 <a:latin typeface="微软雅黑"/>
                 <a:ea typeface="微软雅黑"/>
                 <a:cs typeface="微软雅黑"/>
               </a:rPr>
-              <a:t>!</a:t>
-            </a:r>
-          </a:p>
-        </p:txBody>
-      </p:sp>
-      <p:sp>
-        <p:nvSpPr>
-          <p:cNvPr id="8" name="TextBox 7"/>
-          <p:cNvSpPr txBox="1"/>
-          <p:nvPr/>
-        </p:nvSpPr>
-        <p:spPr>
-          <a:xfrm>
-            <a:off x="1371600" y="1527048"/>
-            <a:ext cx="4434840" cy="457200"/>
-          </a:xfrm>
-          <a:prstGeom prst="rect">
-            <a:avLst/>
-          </a:prstGeom>
-          <a:noFill/>
-        </p:spPr>
-        <p:txBody>
-          <a:bodyPr wrap="square" anchor="t" lIns="0" rIns="0" tIns="0" bIns="0">
-            <a:spAutoFit/>
-          </a:bodyPr>
-          <a:lstStyle/>
-          <a:p>
-            <a:pPr algn="l">
+              <a:t>正四面体</a:t>
+            </a:r>
+          </a:p>
+          <a:p>
+            <a:pPr>
               <a:lnSpc>
-                <a:spcPct val="110000"/>
+                <a:spcPct val="140000"/>
               </a:lnSpc>
+              <a:spcBef>
+                <a:spcPts val="500"/>
+              </a:spcBef>
             </a:pPr>
             <a:r>
-              <a:rPr sz="1600" b="1">
-                <a:solidFill>
-                  <a:srgbClr val="1C2A33"/>
-                </a:solidFill>
-                <a:latin typeface="微软雅黑"/>
-                <a:ea typeface="微软雅黑"/>
-                <a:cs typeface="微软雅黑"/>
-              </a:rPr>
-              <a:t/>
-            </a:r>
-          </a:p>
-        </p:txBody>
-      </p:sp>
-      <p:sp>
-        <p:nvSpPr>
-          <p:cNvPr id="9" name="TextBox 8"/>
-          <p:cNvSpPr txBox="1"/>
-          <p:nvPr/>
-        </p:nvSpPr>
-        <p:spPr>
-          <a:xfrm>
-            <a:off x="1371600" y="1965960"/>
-            <a:ext cx="4434840" cy="1417320"/>
-          </a:xfrm>
-          <a:prstGeom prst="rect">
-            <a:avLst/>
-          </a:prstGeom>
-          <a:noFill/>
-        </p:spPr>
-        <p:txBody>
-          <a:bodyPr wrap="square" anchor="t" lIns="0" rIns="0" tIns="0" bIns="0">
-            <a:spAutoFit/>
-          </a:bodyPr>
-          <a:lstStyle/>
-          <a:p>
-            <a:pPr algn="l">
-              <a:lnSpc>
-                <a:spcPct val="128000"/>
-              </a:lnSpc>
-            </a:pPr>
-            <a:r>
-              <a:rPr sz="1200" b="0">
+              <a:rPr sz="1250">
                 <a:solidFill>
                   <a:srgbClr val="1C2A33"/>
                 </a:solidFill>
@@ -6970,7 +6325,7 @@
                 <a:ea typeface="楷体"/>
                 <a:cs typeface="楷体"/>
               </a:rPr>
-              <a:t>① 取代vs置换。原因：取代无单质生成、分步，与置换(单质+化合物→新单质+新化合物)不同，易混。</a:t>
+              <a:t>原因：空间结构抽象，键角固定，需模型。</a:t>
             </a:r>
           </a:p>
         </p:txBody>
@@ -6983,8 +6338,8 @@
         </p:nvSpPr>
         <p:spPr>
           <a:xfrm>
-            <a:off x="6263640" y="1417320"/>
-            <a:ext cx="5349240" cy="2057400"/>
+            <a:off x="8158276" y="2103120"/>
+            <a:ext cx="3393338" cy="3657600"/>
           </a:xfrm>
           <a:prstGeom prst="roundRect">
             <a:avLst/>
@@ -6992,9 +6347,9 @@
           <a:solidFill>
             <a:srgbClr val="FFFFFF"/>
           </a:solidFill>
-          <a:ln w="22860">
+          <a:ln w="20320">
             <a:solidFill>
-              <a:srgbClr val="B23A2A"/>
+              <a:srgbClr val="C8A86B"/>
             </a:solidFill>
           </a:ln>
           <a:effectLst/>
@@ -7023,58 +6378,14 @@
       </p:sp>
       <p:sp>
         <p:nvSpPr>
-          <p:cNvPr id="11" name="Oval 10"/>
-          <p:cNvSpPr/>
-          <p:nvPr/>
-        </p:nvSpPr>
-        <p:spPr>
-          <a:xfrm>
-            <a:off x="6428232" y="1581912"/>
-            <a:ext cx="457200" cy="457200"/>
-          </a:xfrm>
-          <a:prstGeom prst="ellipse">
-            <a:avLst/>
-          </a:prstGeom>
-          <a:solidFill>
-            <a:srgbClr val="B23A2A"/>
-          </a:solidFill>
-          <a:ln>
-            <a:noFill/>
-          </a:ln>
-          <a:effectLst/>
-        </p:spPr>
-        <p:style>
-          <a:lnRef idx="1">
-            <a:schemeClr val="accent1"/>
-          </a:lnRef>
-          <a:fillRef idx="3">
-            <a:schemeClr val="accent1"/>
-          </a:fillRef>
-          <a:effectRef idx="2">
-            <a:schemeClr val="accent1"/>
-          </a:effectRef>
-          <a:fontRef idx="minor">
-            <a:schemeClr val="lt1"/>
-          </a:fontRef>
-        </p:style>
-        <p:txBody>
-          <a:bodyPr rtlCol="0" anchor="ctr"/>
-          <a:lstStyle/>
-          <a:p>
-            <a:pPr algn="ctr"/>
-          </a:p>
-        </p:txBody>
-      </p:sp>
-      <p:sp>
-        <p:nvSpPr>
-          <p:cNvPr id="12" name="TextBox 11"/>
+          <p:cNvPr id="11" name="TextBox 10"/>
           <p:cNvSpPr txBox="1"/>
           <p:nvPr/>
         </p:nvSpPr>
         <p:spPr>
           <a:xfrm>
-            <a:off x="6428232" y="1636776"/>
-            <a:ext cx="457200" cy="384048"/>
+            <a:off x="8386876" y="2267712"/>
+            <a:ext cx="2936138" cy="3328416"/>
           </a:xfrm>
           <a:prstGeom prst="rect">
             <a:avLst/>
@@ -7082,96 +6393,34 @@
           <a:noFill/>
         </p:spPr>
         <p:txBody>
-          <a:bodyPr wrap="square" anchor="t" lIns="0" rIns="0" tIns="0" bIns="0">
+          <a:bodyPr wrap="square" lIns="0" rIns="0" tIns="0" bIns="0">
             <a:spAutoFit/>
           </a:bodyPr>
           <a:lstStyle/>
           <a:p>
-            <a:pPr algn="ctr"/>
-            <a:r>
-              <a:rPr sz="1600" b="1">
-                <a:solidFill>
-                  <a:srgbClr val="FFFFFF"/>
+            <a:r>
+              <a:rPr sz="1500" b="1">
+                <a:solidFill>
+                  <a:srgbClr val="C8A86B"/>
                 </a:solidFill>
                 <a:latin typeface="微软雅黑"/>
                 <a:ea typeface="微软雅黑"/>
                 <a:cs typeface="微软雅黑"/>
               </a:rPr>
-              <a:t>!</a:t>
-            </a:r>
-          </a:p>
-        </p:txBody>
-      </p:sp>
-      <p:sp>
-        <p:nvSpPr>
-          <p:cNvPr id="13" name="TextBox 12"/>
-          <p:cNvSpPr txBox="1"/>
-          <p:nvPr/>
-        </p:nvSpPr>
-        <p:spPr>
-          <a:xfrm>
-            <a:off x="6995160" y="1527048"/>
-            <a:ext cx="4434840" cy="457200"/>
-          </a:xfrm>
-          <a:prstGeom prst="rect">
-            <a:avLst/>
-          </a:prstGeom>
-          <a:noFill/>
-        </p:spPr>
-        <p:txBody>
-          <a:bodyPr wrap="square" anchor="t" lIns="0" rIns="0" tIns="0" bIns="0">
-            <a:spAutoFit/>
-          </a:bodyPr>
-          <a:lstStyle/>
-          <a:p>
-            <a:pPr algn="l">
+              <a:t>同分异构</a:t>
+            </a:r>
+          </a:p>
+          <a:p>
+            <a:pPr>
               <a:lnSpc>
-                <a:spcPct val="110000"/>
+                <a:spcPct val="140000"/>
               </a:lnSpc>
+              <a:spcBef>
+                <a:spcPts val="500"/>
+              </a:spcBef>
             </a:pPr>
             <a:r>
-              <a:rPr sz="1600" b="1">
-                <a:solidFill>
-                  <a:srgbClr val="1C2A33"/>
-                </a:solidFill>
-                <a:latin typeface="微软雅黑"/>
-                <a:ea typeface="微软雅黑"/>
-                <a:cs typeface="微软雅黑"/>
-              </a:rPr>
-              <a:t/>
-            </a:r>
-          </a:p>
-        </p:txBody>
-      </p:sp>
-      <p:sp>
-        <p:nvSpPr>
-          <p:cNvPr id="14" name="TextBox 13"/>
-          <p:cNvSpPr txBox="1"/>
-          <p:nvPr/>
-        </p:nvSpPr>
-        <p:spPr>
-          <a:xfrm>
-            <a:off x="6995160" y="1965960"/>
-            <a:ext cx="4434840" cy="1417320"/>
-          </a:xfrm>
-          <a:prstGeom prst="rect">
-            <a:avLst/>
-          </a:prstGeom>
-          <a:noFill/>
-        </p:spPr>
-        <p:txBody>
-          <a:bodyPr wrap="square" anchor="t" lIns="0" rIns="0" tIns="0" bIns="0">
-            <a:spAutoFit/>
-          </a:bodyPr>
-          <a:lstStyle/>
-          <a:p>
-            <a:pPr algn="l">
-              <a:lnSpc>
-                <a:spcPct val="128000"/>
-              </a:lnSpc>
-            </a:pPr>
-            <a:r>
-              <a:rPr sz="1400" b="0">
+              <a:rPr sz="1250">
                 <a:solidFill>
                   <a:srgbClr val="1C2A33"/>
                 </a:solidFill>
@@ -7179,223 +6428,14 @@
                 <a:ea typeface="楷体"/>
                 <a:cs typeface="楷体"/>
               </a:rPr>
-              <a:t>② 正四面体。原因：空间结构抽象，键角固定，需模型。</a:t>
-            </a:r>
-          </a:p>
-        </p:txBody>
-      </p:sp>
-      <p:sp>
-        <p:nvSpPr>
-          <p:cNvPr id="15" name="Rounded Rectangle 14"/>
-          <p:cNvSpPr/>
-          <p:nvPr/>
-        </p:nvSpPr>
-        <p:spPr>
-          <a:xfrm>
-            <a:off x="640080" y="3703320"/>
-            <a:ext cx="5349240" cy="2057400"/>
-          </a:xfrm>
-          <a:prstGeom prst="roundRect">
-            <a:avLst/>
-          </a:prstGeom>
-          <a:solidFill>
-            <a:srgbClr val="FFFFFF"/>
-          </a:solidFill>
-          <a:ln w="22860">
-            <a:solidFill>
-              <a:srgbClr val="B23A2A"/>
-            </a:solidFill>
-          </a:ln>
-          <a:effectLst/>
-        </p:spPr>
-        <p:style>
-          <a:lnRef idx="1">
-            <a:schemeClr val="accent1"/>
-          </a:lnRef>
-          <a:fillRef idx="3">
-            <a:schemeClr val="accent1"/>
-          </a:fillRef>
-          <a:effectRef idx="2">
-            <a:schemeClr val="accent1"/>
-          </a:effectRef>
-          <a:fontRef idx="minor">
-            <a:schemeClr val="lt1"/>
-          </a:fontRef>
-        </p:style>
-        <p:txBody>
-          <a:bodyPr rtlCol="0" anchor="ctr"/>
-          <a:lstStyle/>
-          <a:p>
-            <a:pPr algn="ctr"/>
-          </a:p>
-        </p:txBody>
-      </p:sp>
-      <p:sp>
-        <p:nvSpPr>
-          <p:cNvPr id="16" name="Oval 15"/>
-          <p:cNvSpPr/>
-          <p:nvPr/>
-        </p:nvSpPr>
-        <p:spPr>
-          <a:xfrm>
-            <a:off x="804672" y="3867912"/>
-            <a:ext cx="457200" cy="457200"/>
-          </a:xfrm>
-          <a:prstGeom prst="ellipse">
-            <a:avLst/>
-          </a:prstGeom>
-          <a:solidFill>
-            <a:srgbClr val="B23A2A"/>
-          </a:solidFill>
-          <a:ln>
-            <a:noFill/>
-          </a:ln>
-          <a:effectLst/>
-        </p:spPr>
-        <p:style>
-          <a:lnRef idx="1">
-            <a:schemeClr val="accent1"/>
-          </a:lnRef>
-          <a:fillRef idx="3">
-            <a:schemeClr val="accent1"/>
-          </a:fillRef>
-          <a:effectRef idx="2">
-            <a:schemeClr val="accent1"/>
-          </a:effectRef>
-          <a:fontRef idx="minor">
-            <a:schemeClr val="lt1"/>
-          </a:fontRef>
-        </p:style>
-        <p:txBody>
-          <a:bodyPr rtlCol="0" anchor="ctr"/>
-          <a:lstStyle/>
-          <a:p>
-            <a:pPr algn="ctr"/>
-          </a:p>
-        </p:txBody>
-      </p:sp>
-      <p:sp>
-        <p:nvSpPr>
-          <p:cNvPr id="17" name="TextBox 16"/>
-          <p:cNvSpPr txBox="1"/>
-          <p:nvPr/>
-        </p:nvSpPr>
-        <p:spPr>
-          <a:xfrm>
-            <a:off x="804672" y="3922776"/>
-            <a:ext cx="457200" cy="384048"/>
-          </a:xfrm>
-          <a:prstGeom prst="rect">
-            <a:avLst/>
-          </a:prstGeom>
-          <a:noFill/>
-        </p:spPr>
-        <p:txBody>
-          <a:bodyPr wrap="square" anchor="t" lIns="0" rIns="0" tIns="0" bIns="0">
-            <a:spAutoFit/>
-          </a:bodyPr>
-          <a:lstStyle/>
-          <a:p>
-            <a:pPr algn="ctr"/>
-            <a:r>
-              <a:rPr sz="1600" b="1">
-                <a:solidFill>
-                  <a:srgbClr val="FFFFFF"/>
-                </a:solidFill>
-                <a:latin typeface="微软雅黑"/>
-                <a:ea typeface="微软雅黑"/>
-                <a:cs typeface="微软雅黑"/>
-              </a:rPr>
-              <a:t>!</a:t>
-            </a:r>
-          </a:p>
-        </p:txBody>
-      </p:sp>
-      <p:sp>
-        <p:nvSpPr>
-          <p:cNvPr id="18" name="TextBox 17"/>
-          <p:cNvSpPr txBox="1"/>
-          <p:nvPr/>
-        </p:nvSpPr>
-        <p:spPr>
-          <a:xfrm>
-            <a:off x="1371600" y="3813048"/>
-            <a:ext cx="4434840" cy="457200"/>
-          </a:xfrm>
-          <a:prstGeom prst="rect">
-            <a:avLst/>
-          </a:prstGeom>
-          <a:noFill/>
-        </p:spPr>
-        <p:txBody>
-          <a:bodyPr wrap="square" anchor="t" lIns="0" rIns="0" tIns="0" bIns="0">
-            <a:spAutoFit/>
-          </a:bodyPr>
-          <a:lstStyle/>
-          <a:p>
-            <a:pPr algn="l">
-              <a:lnSpc>
-                <a:spcPct val="110000"/>
-              </a:lnSpc>
-            </a:pPr>
-            <a:r>
-              <a:rPr sz="1600" b="1">
-                <a:solidFill>
-                  <a:srgbClr val="1C2A33"/>
-                </a:solidFill>
-                <a:latin typeface="微软雅黑"/>
-                <a:ea typeface="微软雅黑"/>
-                <a:cs typeface="微软雅黑"/>
-              </a:rPr>
-              <a:t/>
-            </a:r>
-          </a:p>
-        </p:txBody>
-      </p:sp>
-      <p:sp>
-        <p:nvSpPr>
-          <p:cNvPr id="19" name="TextBox 18"/>
-          <p:cNvSpPr txBox="1"/>
-          <p:nvPr/>
-        </p:nvSpPr>
-        <p:spPr>
-          <a:xfrm>
-            <a:off x="1371600" y="4251960"/>
-            <a:ext cx="4434840" cy="1417320"/>
-          </a:xfrm>
-          <a:prstGeom prst="rect">
-            <a:avLst/>
-          </a:prstGeom>
-          <a:noFill/>
-        </p:spPr>
-        <p:txBody>
-          <a:bodyPr wrap="square" anchor="t" lIns="0" rIns="0" tIns="0" bIns="0">
-            <a:spAutoFit/>
-          </a:bodyPr>
-          <a:lstStyle/>
-          <a:p>
-            <a:pPr algn="l">
-              <a:lnSpc>
-                <a:spcPct val="128000"/>
-              </a:lnSpc>
-            </a:pPr>
-            <a:r>
-              <a:rPr sz="1400" b="0">
-                <a:solidFill>
-                  <a:srgbClr val="1C2A33"/>
-                </a:solidFill>
-                <a:latin typeface="楷体"/>
-                <a:ea typeface="楷体"/>
-                <a:cs typeface="楷体"/>
-              </a:rPr>
-              <a:t>③ 同分异构。原因：分子式相同结构不同，与同素异形体(单质)不同。</a:t>
-            </a:r>
-          </a:p>
-        </p:txBody>
-      </p:sp>
-      <p:sp>
-        <p:nvSpPr>
-          <p:cNvPr id="20" name="TextBox 19"/>
+              <a:t>原因：分子式相同结构不同，与同素异形体(单质)不同。</a:t>
+            </a:r>
+          </a:p>
+        </p:txBody>
+      </p:sp>
+      <p:sp>
+        <p:nvSpPr>
+          <p:cNvPr id="12" name="TextBox 11"/>
           <p:cNvSpPr txBox="1"/>
           <p:nvPr/>
         </p:nvSpPr>
@@ -7522,13 +6562,13 @@
             <a:r>
               <a:rPr sz="1300" b="1">
                 <a:solidFill>
-                  <a:srgbClr val="C8A86B"/>
+                  <a:srgbClr val="B23A2A"/>
                 </a:solidFill>
                 <a:latin typeface="微软雅黑"/>
                 <a:ea typeface="微软雅黑"/>
                 <a:cs typeface="微软雅黑"/>
               </a:rPr>
-              <a:t>要点板书</a:t>
+              <a:t>板书精华</a:t>
             </a:r>
           </a:p>
         </p:txBody>
@@ -7548,7 +6588,7 @@
             <a:avLst/>
           </a:prstGeom>
           <a:solidFill>
-            <a:srgbClr val="C8A86B"/>
+            <a:srgbClr val="B23A2A"/>
           </a:solidFill>
           <a:ln>
             <a:noFill/>
@@ -7579,26 +6619,58 @@
       </p:sp>
       <p:sp>
         <p:nvSpPr>
-          <p:cNvPr id="5" name="Rounded Rectangle 4"/>
+          <p:cNvPr id="5" name="TextBox 4"/>
+          <p:cNvSpPr txBox="1"/>
+          <p:nvPr/>
+        </p:nvSpPr>
+        <p:spPr>
+          <a:xfrm>
+            <a:off x="640080" y="1325880"/>
+            <a:ext cx="10911535" cy="548640"/>
+          </a:xfrm>
+          <a:prstGeom prst="rect">
+            <a:avLst/>
+          </a:prstGeom>
+          <a:noFill/>
+        </p:spPr>
+        <p:txBody>
+          <a:bodyPr wrap="square" anchor="t" lIns="0" rIns="0" tIns="0" bIns="0">
+            <a:spAutoFit/>
+          </a:bodyPr>
+          <a:lstStyle/>
+          <a:p>
+            <a:pPr algn="l"/>
+            <a:r>
+              <a:rPr sz="3000" b="1">
+                <a:solidFill>
+                  <a:srgbClr val="1C2A33"/>
+                </a:solidFill>
+                <a:latin typeface="楷体"/>
+                <a:ea typeface="楷体"/>
+                <a:cs typeface="楷体"/>
+              </a:rPr>
+              <a:t>本课板书要点</a:t>
+            </a:r>
+          </a:p>
+        </p:txBody>
+      </p:sp>
+      <p:sp>
+        <p:nvSpPr>
+          <p:cNvPr id="6" name="Rounded Rectangle 5"/>
           <p:cNvSpPr/>
           <p:nvPr/>
         </p:nvSpPr>
         <p:spPr>
           <a:xfrm>
-            <a:off x="640080" y="1417320"/>
-            <a:ext cx="10911535" cy="5394960"/>
+            <a:off x="640080" y="1874520"/>
+            <a:ext cx="10911535" cy="4160520"/>
           </a:xfrm>
           <a:prstGeom prst="roundRect">
             <a:avLst/>
           </a:prstGeom>
           <a:solidFill>
-            <a:srgbClr val="FFFFFF"/>
+            <a:srgbClr val="1C2A33"/>
           </a:solidFill>
-          <a:ln w="25400">
-            <a:solidFill>
-              <a:srgbClr val="C8A86B"/>
-            </a:solidFill>
-          </a:ln>
           <a:effectLst/>
         </p:spPr>
         <p:style>
@@ -7625,14 +6697,14 @@
       </p:sp>
       <p:sp>
         <p:nvSpPr>
-          <p:cNvPr id="6" name="TextBox 5"/>
+          <p:cNvPr id="7" name="TextBox 6"/>
           <p:cNvSpPr txBox="1"/>
           <p:nvPr/>
         </p:nvSpPr>
         <p:spPr>
           <a:xfrm>
-            <a:off x="914400" y="1554480"/>
-            <a:ext cx="10362895" cy="5120640"/>
+            <a:off x="1005840" y="2103120"/>
+            <a:ext cx="10180015" cy="3749039"/>
           </a:xfrm>
           <a:prstGeom prst="rect">
             <a:avLst/>
@@ -7647,38 +6719,197 @@
           <a:p>
             <a:pPr algn="l">
               <a:lnSpc>
-                <a:spcPct val="110000"/>
+                <a:spcPct val="150000"/>
               </a:lnSpc>
               <a:spcAft>
-                <a:spcPts val="100"/>
+                <a:spcPts val="400"/>
               </a:spcAft>
             </a:pPr>
             <a:r>
-              <a:rPr sz="1300" b="0">
-                <a:solidFill>
-                  <a:srgbClr val="1C2A33"/>
-                </a:solidFill>
-                <a:latin typeface="微软雅黑"/>
-                <a:ea typeface="微软雅黑"/>
-                <a:cs typeface="微软雅黑"/>
-              </a:rPr>
-              <a:t>┌── 甲烷 ──┐
-│ 有机物含碳 │
-│ CH4正四面体 │
-│ 键角109°28′ │
-│ CH4+Cl2→ │
-│ CH3Cl+HCl │
-│ (取代,光照) │
-│ C4H10:正/异丁│
-│ 烷(同分异构) │
-└────────────────┘</a:t>
-            </a:r>
-          </a:p>
-        </p:txBody>
-      </p:sp>
-      <p:sp>
-        <p:nvSpPr>
-          <p:cNvPr id="7" name="TextBox 6"/>
+              <a:rPr sz="1500" b="1">
+                <a:solidFill>
+                  <a:srgbClr val="C8A86B"/>
+                </a:solidFill>
+                <a:latin typeface="楷体"/>
+                <a:ea typeface="楷体"/>
+                <a:cs typeface="楷体"/>
+              </a:rPr>
+              <a:t>甲烷</a:t>
+            </a:r>
+          </a:p>
+          <a:p>
+            <a:pPr algn="l">
+              <a:lnSpc>
+                <a:spcPct val="150000"/>
+              </a:lnSpc>
+              <a:spcAft>
+                <a:spcPts val="400"/>
+              </a:spcAft>
+            </a:pPr>
+            <a:r>
+              <a:rPr sz="1500" b="0">
+                <a:solidFill>
+                  <a:srgbClr val="FFFFFF"/>
+                </a:solidFill>
+                <a:latin typeface="楷体"/>
+                <a:ea typeface="楷体"/>
+                <a:cs typeface="楷体"/>
+              </a:rPr>
+              <a:t>有机物含碳</a:t>
+            </a:r>
+          </a:p>
+          <a:p>
+            <a:pPr algn="l">
+              <a:lnSpc>
+                <a:spcPct val="150000"/>
+              </a:lnSpc>
+              <a:spcAft>
+                <a:spcPts val="400"/>
+              </a:spcAft>
+            </a:pPr>
+            <a:r>
+              <a:rPr sz="1500" b="0">
+                <a:solidFill>
+                  <a:srgbClr val="FFFFFF"/>
+                </a:solidFill>
+                <a:latin typeface="楷体"/>
+                <a:ea typeface="楷体"/>
+                <a:cs typeface="楷体"/>
+              </a:rPr>
+              <a:t>CH4正四面体</a:t>
+            </a:r>
+          </a:p>
+          <a:p>
+            <a:pPr algn="l">
+              <a:lnSpc>
+                <a:spcPct val="150000"/>
+              </a:lnSpc>
+              <a:spcAft>
+                <a:spcPts val="400"/>
+              </a:spcAft>
+            </a:pPr>
+            <a:r>
+              <a:rPr sz="1500" b="0">
+                <a:solidFill>
+                  <a:srgbClr val="FFFFFF"/>
+                </a:solidFill>
+                <a:latin typeface="楷体"/>
+                <a:ea typeface="楷体"/>
+                <a:cs typeface="楷体"/>
+              </a:rPr>
+              <a:t>键角109°28′</a:t>
+            </a:r>
+          </a:p>
+          <a:p>
+            <a:pPr algn="l">
+              <a:lnSpc>
+                <a:spcPct val="150000"/>
+              </a:lnSpc>
+              <a:spcAft>
+                <a:spcPts val="400"/>
+              </a:spcAft>
+            </a:pPr>
+            <a:r>
+              <a:rPr sz="1500" b="0">
+                <a:solidFill>
+                  <a:srgbClr val="FFFFFF"/>
+                </a:solidFill>
+                <a:latin typeface="楷体"/>
+                <a:ea typeface="楷体"/>
+                <a:cs typeface="楷体"/>
+              </a:rPr>
+              <a:t>CH4+Cl2→</a:t>
+            </a:r>
+          </a:p>
+          <a:p>
+            <a:pPr algn="l">
+              <a:lnSpc>
+                <a:spcPct val="150000"/>
+              </a:lnSpc>
+              <a:spcAft>
+                <a:spcPts val="400"/>
+              </a:spcAft>
+            </a:pPr>
+            <a:r>
+              <a:rPr sz="1500" b="0">
+                <a:solidFill>
+                  <a:srgbClr val="FFFFFF"/>
+                </a:solidFill>
+                <a:latin typeface="楷体"/>
+                <a:ea typeface="楷体"/>
+                <a:cs typeface="楷体"/>
+              </a:rPr>
+              <a:t>CH3Cl+HCl</a:t>
+            </a:r>
+          </a:p>
+          <a:p>
+            <a:pPr algn="l">
+              <a:lnSpc>
+                <a:spcPct val="150000"/>
+              </a:lnSpc>
+              <a:spcAft>
+                <a:spcPts val="400"/>
+              </a:spcAft>
+            </a:pPr>
+            <a:r>
+              <a:rPr sz="1500" b="0">
+                <a:solidFill>
+                  <a:srgbClr val="FFFFFF"/>
+                </a:solidFill>
+                <a:latin typeface="楷体"/>
+                <a:ea typeface="楷体"/>
+                <a:cs typeface="楷体"/>
+              </a:rPr>
+              <a:t>(取代,光照)</a:t>
+            </a:r>
+          </a:p>
+          <a:p>
+            <a:pPr algn="l">
+              <a:lnSpc>
+                <a:spcPct val="150000"/>
+              </a:lnSpc>
+              <a:spcAft>
+                <a:spcPts val="400"/>
+              </a:spcAft>
+            </a:pPr>
+            <a:r>
+              <a:rPr sz="1500" b="0">
+                <a:solidFill>
+                  <a:srgbClr val="FFFFFF"/>
+                </a:solidFill>
+                <a:latin typeface="楷体"/>
+                <a:ea typeface="楷体"/>
+                <a:cs typeface="楷体"/>
+              </a:rPr>
+              <a:t>C4H10:正/异丁</a:t>
+            </a:r>
+          </a:p>
+          <a:p>
+            <a:pPr algn="l">
+              <a:lnSpc>
+                <a:spcPct val="150000"/>
+              </a:lnSpc>
+              <a:spcAft>
+                <a:spcPts val="400"/>
+              </a:spcAft>
+            </a:pPr>
+            <a:r>
+              <a:rPr sz="1500" b="0">
+                <a:solidFill>
+                  <a:srgbClr val="FFFFFF"/>
+                </a:solidFill>
+                <a:latin typeface="楷体"/>
+                <a:ea typeface="楷体"/>
+                <a:cs typeface="楷体"/>
+              </a:rPr>
+              <a:t>烷(同分异构)</a:t>
+            </a:r>
+          </a:p>
+        </p:txBody>
+      </p:sp>
+      <p:sp>
+        <p:nvSpPr>
+          <p:cNvPr id="8" name="TextBox 7"/>
           <p:cNvSpPr txBox="1"/>
           <p:nvPr/>
         </p:nvSpPr>
@@ -7805,13 +7036,13 @@
             <a:r>
               <a:rPr sz="1300" b="1">
                 <a:solidFill>
-                  <a:srgbClr val="2E7D6B"/>
+                  <a:srgbClr val="B23A2A"/>
                 </a:solidFill>
                 <a:latin typeface="微软雅黑"/>
                 <a:ea typeface="微软雅黑"/>
                 <a:cs typeface="微软雅黑"/>
               </a:rPr>
-              <a:t>分层作业</a:t>
+              <a:t>作业</a:t>
             </a:r>
           </a:p>
         </p:txBody>
@@ -7831,7 +7062,7 @@
             <a:avLst/>
           </a:prstGeom>
           <a:solidFill>
-            <a:srgbClr val="2E7D6B"/>
+            <a:srgbClr val="B23A2A"/>
           </a:solidFill>
           <a:ln>
             <a:noFill/>
@@ -7862,14 +7093,51 @@
       </p:sp>
       <p:sp>
         <p:nvSpPr>
-          <p:cNvPr id="5" name="Rounded Rectangle 4"/>
+          <p:cNvPr id="5" name="TextBox 4"/>
+          <p:cNvSpPr txBox="1"/>
+          <p:nvPr/>
+        </p:nvSpPr>
+        <p:spPr>
+          <a:xfrm>
+            <a:off x="640080" y="1325880"/>
+            <a:ext cx="10911535" cy="548640"/>
+          </a:xfrm>
+          <a:prstGeom prst="rect">
+            <a:avLst/>
+          </a:prstGeom>
+          <a:noFill/>
+        </p:spPr>
+        <p:txBody>
+          <a:bodyPr wrap="square" anchor="t" lIns="0" rIns="0" tIns="0" bIns="0">
+            <a:spAutoFit/>
+          </a:bodyPr>
+          <a:lstStyle/>
+          <a:p>
+            <a:pPr algn="l"/>
+            <a:r>
+              <a:rPr sz="3000" b="1">
+                <a:solidFill>
+                  <a:srgbClr val="1C2A33"/>
+                </a:solidFill>
+                <a:latin typeface="楷体"/>
+                <a:ea typeface="楷体"/>
+                <a:cs typeface="楷体"/>
+              </a:rPr>
+              <a:t>分层作业</a:t>
+            </a:r>
+          </a:p>
+        </p:txBody>
+      </p:sp>
+      <p:sp>
+        <p:nvSpPr>
+          <p:cNvPr id="6" name="Rounded Rectangle 5"/>
           <p:cNvSpPr/>
           <p:nvPr/>
         </p:nvSpPr>
         <p:spPr>
           <a:xfrm>
-            <a:off x="640080" y="1417320"/>
-            <a:ext cx="10911535" cy="1417320"/>
+            <a:off x="640080" y="2103120"/>
+            <a:ext cx="3393338" cy="3200400"/>
           </a:xfrm>
           <a:prstGeom prst="roundRect">
             <a:avLst/>
@@ -7877,7 +7145,110 @@
           <a:solidFill>
             <a:srgbClr val="FFFFFF"/>
           </a:solidFill>
-          <a:ln w="22860">
+          <a:ln w="20320">
+            <a:solidFill>
+              <a:srgbClr val="B23A2A"/>
+            </a:solidFill>
+          </a:ln>
+          <a:effectLst/>
+        </p:spPr>
+        <p:style>
+          <a:lnRef idx="1">
+            <a:schemeClr val="accent1"/>
+          </a:lnRef>
+          <a:fillRef idx="3">
+            <a:schemeClr val="accent1"/>
+          </a:fillRef>
+          <a:effectRef idx="2">
+            <a:schemeClr val="accent1"/>
+          </a:effectRef>
+          <a:fontRef idx="minor">
+            <a:schemeClr val="lt1"/>
+          </a:fontRef>
+        </p:style>
+        <p:txBody>
+          <a:bodyPr rtlCol="0" anchor="ctr"/>
+          <a:lstStyle/>
+          <a:p>
+            <a:pPr algn="ctr"/>
+          </a:p>
+        </p:txBody>
+      </p:sp>
+      <p:sp>
+        <p:nvSpPr>
+          <p:cNvPr id="7" name="TextBox 6"/>
+          <p:cNvSpPr txBox="1"/>
+          <p:nvPr/>
+        </p:nvSpPr>
+        <p:spPr>
+          <a:xfrm>
+            <a:off x="868680" y="2267712"/>
+            <a:ext cx="2936138" cy="2871216"/>
+          </a:xfrm>
+          <a:prstGeom prst="rect">
+            <a:avLst/>
+          </a:prstGeom>
+          <a:noFill/>
+        </p:spPr>
+        <p:txBody>
+          <a:bodyPr wrap="square" lIns="0" rIns="0" tIns="0" bIns="0">
+            <a:spAutoFit/>
+          </a:bodyPr>
+          <a:lstStyle/>
+          <a:p>
+            <a:r>
+              <a:rPr sz="1500" b="1">
+                <a:solidFill>
+                  <a:srgbClr val="B23A2A"/>
+                </a:solidFill>
+                <a:latin typeface="微软雅黑"/>
+                <a:ea typeface="微软雅黑"/>
+                <a:cs typeface="微软雅黑"/>
+              </a:rPr>
+              <a:t>基础 · 必做</a:t>
+            </a:r>
+          </a:p>
+          <a:p>
+            <a:pPr>
+              <a:lnSpc>
+                <a:spcPct val="140000"/>
+              </a:lnSpc>
+              <a:spcBef>
+                <a:spcPts val="500"/>
+              </a:spcBef>
+            </a:pPr>
+            <a:r>
+              <a:rPr sz="1250">
+                <a:solidFill>
+                  <a:srgbClr val="1C2A33"/>
+                </a:solidFill>
+                <a:latin typeface="楷体"/>
+                <a:ea typeface="楷体"/>
+                <a:cs typeface="楷体"/>
+              </a:rPr>
+              <a:t>1. 甲烷分子的空间结构是什么？2. 写出甲烷与氯气在光照下第一步取代反应的化学方程式，并说明反应类型。3. 什么是同分异构现象？举一例。</a:t>
+            </a:r>
+          </a:p>
+        </p:txBody>
+      </p:sp>
+      <p:sp>
+        <p:nvSpPr>
+          <p:cNvPr id="8" name="Rounded Rectangle 7"/>
+          <p:cNvSpPr/>
+          <p:nvPr/>
+        </p:nvSpPr>
+        <p:spPr>
+          <a:xfrm>
+            <a:off x="4399178" y="2103120"/>
+            <a:ext cx="3393338" cy="3200400"/>
+          </a:xfrm>
+          <a:prstGeom prst="roundRect">
+            <a:avLst/>
+          </a:prstGeom>
+          <a:solidFill>
+            <a:srgbClr val="FFFFFF"/>
+          </a:solidFill>
+          <a:ln w="20320">
             <a:solidFill>
               <a:srgbClr val="2E7D6B"/>
             </a:solidFill>
@@ -7908,14 +7279,14 @@
       </p:sp>
       <p:sp>
         <p:nvSpPr>
-          <p:cNvPr id="6" name="TextBox 5"/>
+          <p:cNvPr id="9" name="TextBox 8"/>
           <p:cNvSpPr txBox="1"/>
           <p:nvPr/>
         </p:nvSpPr>
         <p:spPr>
           <a:xfrm>
-            <a:off x="1371600" y="1527048"/>
-            <a:ext cx="9997135" cy="457200"/>
+            <a:off x="4627778" y="2267712"/>
+            <a:ext cx="2936138" cy="2871216"/>
           </a:xfrm>
           <a:prstGeom prst="rect">
             <a:avLst/>
@@ -7923,59 +7294,34 @@
           <a:noFill/>
         </p:spPr>
         <p:txBody>
-          <a:bodyPr wrap="square" anchor="t" lIns="0" rIns="0" tIns="0" bIns="0">
+          <a:bodyPr wrap="square" lIns="0" rIns="0" tIns="0" bIns="0">
             <a:spAutoFit/>
           </a:bodyPr>
           <a:lstStyle/>
           <a:p>
-            <a:pPr algn="l">
-              <a:lnSpc>
-                <a:spcPct val="110000"/>
-              </a:lnSpc>
-            </a:pPr>
-            <a:r>
-              <a:rPr sz="1600" b="1">
-                <a:solidFill>
-                  <a:srgbClr val="1C2A33"/>
+            <a:r>
+              <a:rPr sz="1500" b="1">
+                <a:solidFill>
+                  <a:srgbClr val="2E7D6B"/>
                 </a:solidFill>
                 <a:latin typeface="微软雅黑"/>
                 <a:ea typeface="微软雅黑"/>
                 <a:cs typeface="微软雅黑"/>
               </a:rPr>
-              <a:t/>
-            </a:r>
-          </a:p>
-        </p:txBody>
-      </p:sp>
-      <p:sp>
-        <p:nvSpPr>
-          <p:cNvPr id="7" name="TextBox 6"/>
-          <p:cNvSpPr txBox="1"/>
-          <p:nvPr/>
-        </p:nvSpPr>
-        <p:spPr>
-          <a:xfrm>
-            <a:off x="1371600" y="1965960"/>
-            <a:ext cx="9997135" cy="777240"/>
-          </a:xfrm>
-          <a:prstGeom prst="rect">
-            <a:avLst/>
-          </a:prstGeom>
-          <a:noFill/>
-        </p:spPr>
-        <p:txBody>
-          <a:bodyPr wrap="square" anchor="t" lIns="0" rIns="0" tIns="0" bIns="0">
-            <a:spAutoFit/>
-          </a:bodyPr>
-          <a:lstStyle/>
-          <a:p>
-            <a:pPr algn="l">
+              <a:t>提高 · 选做</a:t>
+            </a:r>
+          </a:p>
+          <a:p>
+            <a:pPr>
               <a:lnSpc>
-                <a:spcPct val="128000"/>
+                <a:spcPct val="140000"/>
               </a:lnSpc>
+              <a:spcBef>
+                <a:spcPts val="500"/>
+              </a:spcBef>
             </a:pPr>
             <a:r>
-              <a:rPr sz="1100" b="0">
+              <a:rPr sz="1250">
                 <a:solidFill>
                   <a:srgbClr val="1C2A33"/>
                 </a:solidFill>
@@ -7983,21 +7329,21 @@
                 <a:ea typeface="楷体"/>
                 <a:cs typeface="楷体"/>
               </a:rPr>
-              <a:t>【基础作业】1. 甲烷分子的空间结构是什么？2. 写出甲烷与氯气在光照下第一步取代反应的化学方程式，并说明反应类型。3. 什么是同分异构现象？举一例。</a:t>
-            </a:r>
-          </a:p>
-        </p:txBody>
-      </p:sp>
-      <p:sp>
-        <p:nvSpPr>
-          <p:cNvPr id="8" name="Rounded Rectangle 7"/>
+              <a:t>甲烷的二氯代物有几种？为什么能说明甲烷是正四面体而非平面正方形？</a:t>
+            </a:r>
+          </a:p>
+        </p:txBody>
+      </p:sp>
+      <p:sp>
+        <p:nvSpPr>
+          <p:cNvPr id="10" name="Rounded Rectangle 9"/>
           <p:cNvSpPr/>
           <p:nvPr/>
         </p:nvSpPr>
         <p:spPr>
           <a:xfrm>
-            <a:off x="640080" y="2971800"/>
-            <a:ext cx="10911535" cy="1417320"/>
+            <a:off x="8158276" y="2103120"/>
+            <a:ext cx="3393338" cy="3200400"/>
           </a:xfrm>
           <a:prstGeom prst="roundRect">
             <a:avLst/>
@@ -8005,9 +7351,9 @@
           <a:solidFill>
             <a:srgbClr val="FFFFFF"/>
           </a:solidFill>
-          <a:ln w="22860">
+          <a:ln w="20320">
             <a:solidFill>
-              <a:srgbClr val="2E7D6B"/>
+              <a:srgbClr val="C8A86B"/>
             </a:solidFill>
           </a:ln>
           <a:effectLst/>
@@ -8036,14 +7382,156 @@
       </p:sp>
       <p:sp>
         <p:nvSpPr>
-          <p:cNvPr id="9" name="TextBox 8"/>
+          <p:cNvPr id="11" name="TextBox 10"/>
           <p:cNvSpPr txBox="1"/>
           <p:nvPr/>
         </p:nvSpPr>
         <p:spPr>
           <a:xfrm>
-            <a:off x="1371600" y="3081528"/>
-            <a:ext cx="9997135" cy="457200"/>
+            <a:off x="8386876" y="2267712"/>
+            <a:ext cx="2936138" cy="2871216"/>
+          </a:xfrm>
+          <a:prstGeom prst="rect">
+            <a:avLst/>
+          </a:prstGeom>
+          <a:noFill/>
+        </p:spPr>
+        <p:txBody>
+          <a:bodyPr wrap="square" lIns="0" rIns="0" tIns="0" bIns="0">
+            <a:spAutoFit/>
+          </a:bodyPr>
+          <a:lstStyle/>
+          <a:p>
+            <a:r>
+              <a:rPr sz="1500" b="1">
+                <a:solidFill>
+                  <a:srgbClr val="C8A86B"/>
+                </a:solidFill>
+                <a:latin typeface="微软雅黑"/>
+                <a:ea typeface="微软雅黑"/>
+                <a:cs typeface="微软雅黑"/>
+              </a:rPr>
+              <a:t>拓展 · 延伸</a:t>
+            </a:r>
+          </a:p>
+          <a:p>
+            <a:pPr>
+              <a:lnSpc>
+                <a:spcPct val="140000"/>
+              </a:lnSpc>
+              <a:spcBef>
+                <a:spcPts val="500"/>
+              </a:spcBef>
+            </a:pPr>
+            <a:r>
+              <a:rPr sz="1250">
+                <a:solidFill>
+                  <a:srgbClr val="1C2A33"/>
+                </a:solidFill>
+                <a:latin typeface="楷体"/>
+                <a:ea typeface="楷体"/>
+                <a:cs typeface="楷体"/>
+              </a:rPr>
+              <a:t>联系生活或后续课题，举一例说明本课知识的应用。</a:t>
+            </a:r>
+          </a:p>
+        </p:txBody>
+      </p:sp>
+      <p:sp>
+        <p:nvSpPr>
+          <p:cNvPr id="12" name="Rounded Rectangle 11"/>
+          <p:cNvSpPr/>
+          <p:nvPr/>
+        </p:nvSpPr>
+        <p:spPr>
+          <a:xfrm>
+            <a:off x="640080" y="5440680"/>
+            <a:ext cx="10911535" cy="914400"/>
+          </a:xfrm>
+          <a:prstGeom prst="roundRect">
+            <a:avLst/>
+          </a:prstGeom>
+          <a:solidFill>
+            <a:srgbClr val="E7DFD2"/>
+          </a:solidFill>
+          <a:effectLst/>
+        </p:spPr>
+        <p:style>
+          <a:lnRef idx="1">
+            <a:schemeClr val="accent1"/>
+          </a:lnRef>
+          <a:fillRef idx="3">
+            <a:schemeClr val="accent1"/>
+          </a:fillRef>
+          <a:effectRef idx="2">
+            <a:schemeClr val="accent1"/>
+          </a:effectRef>
+          <a:fontRef idx="minor">
+            <a:schemeClr val="lt1"/>
+          </a:fontRef>
+        </p:style>
+        <p:txBody>
+          <a:bodyPr rtlCol="0" anchor="ctr"/>
+          <a:lstStyle/>
+          <a:p>
+            <a:pPr algn="ctr"/>
+          </a:p>
+        </p:txBody>
+      </p:sp>
+      <p:sp>
+        <p:nvSpPr>
+          <p:cNvPr id="13" name="Rectangle 12"/>
+          <p:cNvSpPr/>
+          <p:nvPr/>
+        </p:nvSpPr>
+        <p:spPr>
+          <a:xfrm>
+            <a:off x="914400" y="5650992"/>
+            <a:ext cx="54864" cy="279400"/>
+          </a:xfrm>
+          <a:prstGeom prst="rect">
+            <a:avLst/>
+          </a:prstGeom>
+          <a:solidFill>
+            <a:srgbClr val="B23A2A"/>
+          </a:solidFill>
+          <a:ln>
+            <a:noFill/>
+          </a:ln>
+          <a:effectLst/>
+        </p:spPr>
+        <p:style>
+          <a:lnRef idx="1">
+            <a:schemeClr val="accent1"/>
+          </a:lnRef>
+          <a:fillRef idx="3">
+            <a:schemeClr val="accent1"/>
+          </a:fillRef>
+          <a:effectRef idx="2">
+            <a:schemeClr val="accent1"/>
+          </a:effectRef>
+          <a:fontRef idx="minor">
+            <a:schemeClr val="lt1"/>
+          </a:fontRef>
+        </p:style>
+        <p:txBody>
+          <a:bodyPr rtlCol="0" anchor="ctr"/>
+          <a:lstStyle/>
+          <a:p>
+            <a:pPr algn="ctr"/>
+          </a:p>
+        </p:txBody>
+      </p:sp>
+      <p:sp>
+        <p:nvSpPr>
+          <p:cNvPr id="14" name="TextBox 13"/>
+          <p:cNvSpPr txBox="1"/>
+          <p:nvPr/>
+        </p:nvSpPr>
+        <p:spPr>
+          <a:xfrm>
+            <a:off x="1143000" y="5532120"/>
+            <a:ext cx="10088575" cy="731520"/>
           </a:xfrm>
           <a:prstGeom prst="rect">
             <a:avLst/>
@@ -8056,52 +7544,7 @@
           </a:bodyPr>
           <a:lstStyle/>
           <a:p>
-            <a:pPr algn="l">
-              <a:lnSpc>
-                <a:spcPct val="110000"/>
-              </a:lnSpc>
-            </a:pPr>
-            <a:r>
-              <a:rPr sz="1600" b="1">
-                <a:solidFill>
-                  <a:srgbClr val="1C2A33"/>
-                </a:solidFill>
-                <a:latin typeface="微软雅黑"/>
-                <a:ea typeface="微软雅黑"/>
-                <a:cs typeface="微软雅黑"/>
-              </a:rPr>
-              <a:t/>
-            </a:r>
-          </a:p>
-        </p:txBody>
-      </p:sp>
-      <p:sp>
-        <p:nvSpPr>
-          <p:cNvPr id="10" name="TextBox 9"/>
-          <p:cNvSpPr txBox="1"/>
-          <p:nvPr/>
-        </p:nvSpPr>
-        <p:spPr>
-          <a:xfrm>
-            <a:off x="1371600" y="3520440"/>
-            <a:ext cx="9997135" cy="777240"/>
-          </a:xfrm>
-          <a:prstGeom prst="rect">
-            <a:avLst/>
-          </a:prstGeom>
-          <a:noFill/>
-        </p:spPr>
-        <p:txBody>
-          <a:bodyPr wrap="square" anchor="t" lIns="0" rIns="0" tIns="0" bIns="0">
-            <a:spAutoFit/>
-          </a:bodyPr>
-          <a:lstStyle/>
-          <a:p>
-            <a:pPr algn="l">
-              <a:lnSpc>
-                <a:spcPct val="128000"/>
-              </a:lnSpc>
-            </a:pPr>
+            <a:pPr algn="l"/>
             <a:r>
               <a:rPr sz="1400" b="0">
                 <a:solidFill>
@@ -8111,14 +7554,14 @@
                 <a:ea typeface="楷体"/>
                 <a:cs typeface="楷体"/>
               </a:rPr>
-              <a:t>【提高作业】甲烷的二氯代物有几种？为什么能说明甲烷是正四面体而非平面正方形？</a:t>
-            </a:r>
-          </a:p>
-        </p:txBody>
-      </p:sp>
-      <p:sp>
-        <p:nvSpPr>
-          <p:cNvPr id="11" name="TextBox 10"/>
+              <a:t>本单元主线：有机化合物 —— 认识有机化合物——甲烷</a:t>
+            </a:r>
+          </a:p>
+        </p:txBody>
+      </p:sp>
+      <p:sp>
+        <p:nvSpPr>
+          <p:cNvPr id="15" name="TextBox 14"/>
           <p:cNvSpPr txBox="1"/>
           <p:nvPr/>
         </p:nvSpPr>
@@ -8245,13 +7688,13 @@
             <a:r>
               <a:rPr sz="1300" b="1">
                 <a:solidFill>
-                  <a:srgbClr val="C8A86B"/>
+                  <a:srgbClr val="B23A2A"/>
                 </a:solidFill>
                 <a:latin typeface="微软雅黑"/>
                 <a:ea typeface="微软雅黑"/>
                 <a:cs typeface="微软雅黑"/>
               </a:rPr>
-              <a:t>本课小结</a:t>
+              <a:t>单元小结</a:t>
             </a:r>
           </a:p>
         </p:txBody>
@@ -8271,7 +7714,7 @@
             <a:avLst/>
           </a:prstGeom>
           <a:solidFill>
-            <a:srgbClr val="C8A86B"/>
+            <a:srgbClr val="B23A2A"/>
           </a:solidFill>
           <a:ln>
             <a:noFill/>
@@ -8302,24 +7745,58 @@
       </p:sp>
       <p:sp>
         <p:nvSpPr>
-          <p:cNvPr id="5" name="Rectangle 4"/>
+          <p:cNvPr id="5" name="TextBox 4"/>
+          <p:cNvSpPr txBox="1"/>
+          <p:nvPr/>
+        </p:nvSpPr>
+        <p:spPr>
+          <a:xfrm>
+            <a:off x="640080" y="1325880"/>
+            <a:ext cx="10911535" cy="548640"/>
+          </a:xfrm>
+          <a:prstGeom prst="rect">
+            <a:avLst/>
+          </a:prstGeom>
+          <a:noFill/>
+        </p:spPr>
+        <p:txBody>
+          <a:bodyPr wrap="square" anchor="t" lIns="0" rIns="0" tIns="0" bIns="0">
+            <a:spAutoFit/>
+          </a:bodyPr>
+          <a:lstStyle/>
+          <a:p>
+            <a:pPr algn="l"/>
+            <a:r>
+              <a:rPr sz="3000" b="1">
+                <a:solidFill>
+                  <a:srgbClr val="1C2A33"/>
+                </a:solidFill>
+                <a:latin typeface="楷体"/>
+                <a:ea typeface="楷体"/>
+                <a:cs typeface="楷体"/>
+              </a:rPr>
+              <a:t>本课收束与衔接</a:t>
+            </a:r>
+          </a:p>
+        </p:txBody>
+      </p:sp>
+      <p:sp>
+        <p:nvSpPr>
+          <p:cNvPr id="6" name="Rounded Rectangle 5"/>
           <p:cNvSpPr/>
           <p:nvPr/>
         </p:nvSpPr>
         <p:spPr>
           <a:xfrm>
-            <a:off x="640080" y="1737360"/>
-            <a:ext cx="54864" cy="431800"/>
-          </a:xfrm>
-          <a:prstGeom prst="rect">
+            <a:off x="640080" y="2011680"/>
+            <a:ext cx="10911535" cy="4206240"/>
+          </a:xfrm>
+          <a:prstGeom prst="roundRect">
             <a:avLst/>
           </a:prstGeom>
           <a:solidFill>
-            <a:srgbClr val="C8A86B"/>
+            <a:srgbClr val="1C2A33"/>
           </a:solidFill>
-          <a:ln>
-            <a:noFill/>
-          </a:ln>
           <a:effectLst/>
         </p:spPr>
         <p:style>
@@ -8346,14 +7823,14 @@
       </p:sp>
       <p:sp>
         <p:nvSpPr>
-          <p:cNvPr id="6" name="TextBox 5"/>
+          <p:cNvPr id="7" name="TextBox 6"/>
           <p:cNvSpPr txBox="1"/>
           <p:nvPr/>
         </p:nvSpPr>
         <p:spPr>
           <a:xfrm>
-            <a:off x="868680" y="1645920"/>
-            <a:ext cx="10682935" cy="2194560"/>
+            <a:off x="1005840" y="2286000"/>
+            <a:ext cx="10180015" cy="3657600"/>
           </a:xfrm>
           <a:prstGeom prst="rect">
             <a:avLst/>
@@ -8365,6 +7842,24 @@
             <a:spAutoFit/>
           </a:bodyPr>
           <a:lstStyle/>
+          <a:p>
+            <a:pPr algn="l">
+              <a:spcAft>
+                <a:spcPts val="200"/>
+              </a:spcAft>
+            </a:pPr>
+            <a:r>
+              <a:rPr sz="1700" b="1">
+                <a:solidFill>
+                  <a:srgbClr val="C8A86B"/>
+                </a:solidFill>
+                <a:latin typeface="微软雅黑"/>
+                <a:ea typeface="微软雅黑"/>
+                <a:cs typeface="微软雅黑"/>
+              </a:rPr>
+              <a:t>● 所在单元</a:t>
+            </a:r>
+          </a:p>
           <a:p>
             <a:pPr algn="l">
               <a:lnSpc>
@@ -8375,36 +7870,139 @@
               </a:spcAft>
             </a:pPr>
             <a:r>
-              <a:rPr sz="2200" b="0">
-                <a:solidFill>
-                  <a:srgbClr val="1C2A33"/>
+              <a:rPr sz="1450" b="0">
+                <a:solidFill>
+                  <a:srgbClr val="FFFFFF"/>
                 </a:solidFill>
                 <a:latin typeface="楷体"/>
                 <a:ea typeface="楷体"/>
                 <a:cs typeface="楷体"/>
               </a:rPr>
-              <a:t>本单元主题：有机化合物。把今天学到的方法带进下一篇——自己读、自己想、自己写。</a:t>
-            </a:r>
-          </a:p>
-          <a:p>
-            <a:pPr algn="l"/>
-            <a:r>
-              <a:rPr sz="1600" b="1">
-                <a:solidFill>
-                  <a:srgbClr val="B23A2A"/>
+              <a:t>   必修第二册 · 第7章 有机化合物</a:t>
+            </a:r>
+          </a:p>
+          <a:p>
+            <a:pPr algn="l">
+              <a:spcAft>
+                <a:spcPts val="200"/>
+              </a:spcAft>
+            </a:pPr>
+            <a:r>
+              <a:rPr sz="1700" b="1">
+                <a:solidFill>
+                  <a:srgbClr val="C8A86B"/>
                 </a:solidFill>
                 <a:latin typeface="微软雅黑"/>
                 <a:ea typeface="微软雅黑"/>
                 <a:cs typeface="微软雅黑"/>
               </a:rPr>
-              <a:t>方法迁移：圈关键信息 → 理事件脉络 → 析人物精神</a:t>
-            </a:r>
-          </a:p>
-        </p:txBody>
-      </p:sp>
-      <p:sp>
-        <p:nvSpPr>
-          <p:cNvPr id="7" name="TextBox 6"/>
+              <a:t>● ① 有机物</a:t>
+            </a:r>
+          </a:p>
+          <a:p>
+            <a:pPr algn="l">
+              <a:lnSpc>
+                <a:spcPct val="150000"/>
+              </a:lnSpc>
+              <a:spcAft>
+                <a:spcPts val="1000"/>
+              </a:spcAft>
+            </a:pPr>
+            <a:r>
+              <a:rPr sz="1450" b="0">
+                <a:solidFill>
+                  <a:srgbClr val="FFFFFF"/>
+                </a:solidFill>
+                <a:latin typeface="楷体"/>
+                <a:ea typeface="楷体"/>
+                <a:cs typeface="楷体"/>
+              </a:rPr>
+              <a:t>   含碳化合物(除CO/CO2/碳酸盐等)。</a:t>
+            </a:r>
+          </a:p>
+          <a:p>
+            <a:pPr algn="l">
+              <a:spcAft>
+                <a:spcPts val="200"/>
+              </a:spcAft>
+            </a:pPr>
+            <a:r>
+              <a:rPr sz="1700" b="1">
+                <a:solidFill>
+                  <a:srgbClr val="C8A86B"/>
+                </a:solidFill>
+                <a:latin typeface="微软雅黑"/>
+                <a:ea typeface="微软雅黑"/>
+                <a:cs typeface="微软雅黑"/>
+              </a:rPr>
+              <a:t>● ② 甲烷</a:t>
+            </a:r>
+          </a:p>
+          <a:p>
+            <a:pPr algn="l">
+              <a:lnSpc>
+                <a:spcPct val="150000"/>
+              </a:lnSpc>
+              <a:spcAft>
+                <a:spcPts val="1000"/>
+              </a:spcAft>
+            </a:pPr>
+            <a:r>
+              <a:rPr sz="1450" b="0">
+                <a:solidFill>
+                  <a:srgbClr val="FFFFFF"/>
+                </a:solidFill>
+                <a:latin typeface="楷体"/>
+                <a:ea typeface="楷体"/>
+                <a:cs typeface="楷体"/>
+              </a:rPr>
+              <a:t>   CH4正四面体，C在中心，键角109°28′。</a:t>
+            </a:r>
+          </a:p>
+          <a:p>
+            <a:pPr algn="l">
+              <a:spcAft>
+                <a:spcPts val="200"/>
+              </a:spcAft>
+            </a:pPr>
+            <a:r>
+              <a:rPr sz="1700" b="1">
+                <a:solidFill>
+                  <a:srgbClr val="C8A86B"/>
+                </a:solidFill>
+                <a:latin typeface="微软雅黑"/>
+                <a:ea typeface="微软雅黑"/>
+                <a:cs typeface="微软雅黑"/>
+              </a:rPr>
+              <a:t>● 下节课</a:t>
+            </a:r>
+          </a:p>
+          <a:p>
+            <a:pPr algn="l">
+              <a:lnSpc>
+                <a:spcPct val="150000"/>
+              </a:lnSpc>
+              <a:spcAft>
+                <a:spcPts val="1000"/>
+              </a:spcAft>
+            </a:pPr>
+            <a:r>
+              <a:rPr sz="1450" b="0">
+                <a:solidFill>
+                  <a:srgbClr val="FFFFFF"/>
+                </a:solidFill>
+                <a:latin typeface="楷体"/>
+                <a:ea typeface="楷体"/>
+                <a:cs typeface="楷体"/>
+              </a:rPr>
+              <a:t>   下节课乙烯与加成反应</a:t>
+            </a:r>
+          </a:p>
+        </p:txBody>
+      </p:sp>
+      <p:sp>
+        <p:nvSpPr>
+          <p:cNvPr id="8" name="TextBox 7"/>
           <p:cNvSpPr txBox="1"/>
           <p:nvPr/>
         </p:nvSpPr>
